--- a/Clase_7/PPTs/Clase07_Scoring_Threshold.pptx
+++ b/Clase_7/PPTs/Clase07_Scoring_Threshold.pptx
@@ -4,6 +4,9 @@
   <p:sldMasterIdLst>
     <p:sldMasterId id="2147483648" r:id="rId1"/>
   </p:sldMasterIdLst>
+  <p:notesMasterIdLst>
+    <p:notesMasterId r:id="rId9"/>
+  </p:notesMasterIdLst>
   <p:sldIdLst>
     <p:sldId id="256" r:id="rId2"/>
     <p:sldId id="257" r:id="rId3"/>
@@ -13,10 +16,7 @@
     <p:sldId id="261" r:id="rId7"/>
     <p:sldId id="262" r:id="rId8"/>
   </p:sldIdLst>
-  <p:notesMasterIdLst>
-    <p:notesMasterId r:id="rId9"/>
-  </p:notesMasterIdLst>
-  <p:sldSz cx="9144000" cy="5143500"/>
+  <p:sldSz cx="9144000" cy="5143500" type="screen16x9"/>
   <p:notesSz cx="5143500" cy="9144000"/>
   <p:defaultTextStyle>
     <a:lvl1pPr marL="0" algn="l" defTabSz="914400" rtl="0" eaLnBrk="1" latinLnBrk="0" hangingPunct="1">
@@ -110,6 +110,11 @@
       </a:defRPr>
     </a:lvl9pPr>
   </p:defaultTextStyle>
+  <p:extLst>
+    <p:ext uri="{EFAFB233-063F-42B5-8137-9DF3F51BA10A}">
+      <p15:sldGuideLst xmlns:p15="http://schemas.microsoft.com/office/powerpoint/2012/main"/>
+    </p:ext>
+  </p:extLst>
 </p:presentation>
 </file>
 
@@ -135,234 +140,10 @@
           <a:chExt cx="0" cy="0"/>
         </a:xfrm>
       </p:grpSpPr>
-      <p:sp>
-        <p:nvSpPr>
-          <p:cNvPr id="2" name="Header Placeholder 1"/>
-          <p:cNvSpPr>
-            <a:spLocks noGrp="1"/>
-          </p:cNvSpPr>
-          <p:nvPr>
-            <p:ph type="hdr" sz="quarter"/>
-          </p:nvPr>
-        </p:nvSpPr>
-        <p:spPr>
-          <a:xfrm>
-            <a:off x="0" y="0"/>
-            <a:ext cx="2971800" cy="458788"/>
-          </a:xfrm>
-          <a:prstGeom prst="rect">
-            <a:avLst/>
-          </a:prstGeom>
-        </p:spPr>
-        <p:txBody>
-          <a:bodyPr vert="horz" lIns="91440" tIns="45720" rIns="91440" bIns="45720" rtlCol="0"/>
-          <a:lstStyle>
-            <a:lvl1pPr algn="l">
-              <a:defRPr sz="1200"/>
-            </a:lvl1pPr>
-          </a:lstStyle>
-          <a:p>
-            <a:endParaRPr lang="en-US"/>
-          </a:p>
-        </p:txBody>
-      </p:sp>
-      <p:sp>
-        <p:nvSpPr>
-          <p:cNvPr id="3" name="Date Placeholder 2"/>
-          <p:cNvSpPr>
-            <a:spLocks noGrp="1"/>
-          </p:cNvSpPr>
-          <p:nvPr>
-            <p:ph type="dt" idx="1"/>
-          </p:nvPr>
-        </p:nvSpPr>
-        <p:spPr>
-          <a:xfrm>
-            <a:off x="3884613" y="0"/>
-            <a:ext cx="2971800" cy="458788"/>
-          </a:xfrm>
-          <a:prstGeom prst="rect">
-            <a:avLst/>
-          </a:prstGeom>
-        </p:spPr>
-        <p:txBody>
-          <a:bodyPr vert="horz" lIns="91440" tIns="45720" rIns="91440" bIns="45720" rtlCol="0"/>
-          <a:lstStyle>
-            <a:lvl1pPr algn="r">
-              <a:defRPr sz="1200"/>
-            </a:lvl1pPr>
-          </a:lstStyle>
-          <a:p>
-            <a:fld id="{5282F153-3F37-0F45-9E97-73ACFA13230C}" type="datetimeFigureOut">
-              <a:rPr lang="en-US"/>
-              <a:t>7/23/19</a:t>
-            </a:fld>
-            <a:endParaRPr lang="en-US"/>
-          </a:p>
-        </p:txBody>
-      </p:sp>
-      <p:sp>
-        <p:nvSpPr>
-          <p:cNvPr id="4" name="Slide Image Placeholder 3"/>
-          <p:cNvSpPr>
-            <a:spLocks noGrp="1" noRot="1" noChangeAspect="1"/>
-          </p:cNvSpPr>
-          <p:nvPr>
-            <p:ph type="sldImg" idx="2"/>
-          </p:nvPr>
-        </p:nvSpPr>
-        <p:spPr>
-          <a:xfrm>
-            <a:off x="685800" y="1143000"/>
-            <a:ext cx="5486400" cy="3086100"/>
-          </a:xfrm>
-          <a:prstGeom prst="rect">
-            <a:avLst/>
-          </a:prstGeom>
-          <a:noFill/>
-          <a:ln w="12700">
-            <a:solidFill>
-              <a:prstClr val="black"/>
-            </a:solidFill>
-          </a:ln>
-        </p:spPr>
-        <p:txBody>
-          <a:bodyPr vert="horz" lIns="91440" tIns="45720" rIns="91440" bIns="45720" rtlCol="0" anchor="ctr"/>
-          <a:lstStyle/>
-          <a:p>
-            <a:endParaRPr lang="en-US"/>
-          </a:p>
-        </p:txBody>
-      </p:sp>
-      <p:sp>
-        <p:nvSpPr>
-          <p:cNvPr id="5" name="Notes Placeholder 4"/>
-          <p:cNvSpPr>
-            <a:spLocks noGrp="1"/>
-          </p:cNvSpPr>
-          <p:nvPr>
-            <p:ph type="body" sz="quarter" idx="3"/>
-          </p:nvPr>
-        </p:nvSpPr>
-        <p:spPr>
-          <a:xfrm>
-            <a:off x="685800" y="4400550"/>
-            <a:ext cx="5486400" cy="3600450"/>
-          </a:xfrm>
-          <a:prstGeom prst="rect">
-            <a:avLst/>
-          </a:prstGeom>
-        </p:spPr>
-        <p:txBody>
-          <a:bodyPr vert="horz" lIns="91440" tIns="45720" rIns="91440" bIns="45720" rtlCol="0"/>
-          <a:lstStyle/>
-          <a:p>
-            <a:pPr lvl="0"/>
-            <a:r>
-              <a:rPr lang="en-US"/>
-              <a:t>Click to edit Master text styles</a:t>
-            </a:r>
-          </a:p>
-          <a:p>
-            <a:pPr lvl="1"/>
-            <a:r>
-              <a:rPr lang="en-US"/>
-              <a:t>Second level</a:t>
-            </a:r>
-          </a:p>
-          <a:p>
-            <a:pPr lvl="2"/>
-            <a:r>
-              <a:rPr lang="en-US"/>
-              <a:t>Third level</a:t>
-            </a:r>
-          </a:p>
-          <a:p>
-            <a:pPr lvl="3"/>
-            <a:r>
-              <a:rPr lang="en-US"/>
-              <a:t>Fourth level</a:t>
-            </a:r>
-          </a:p>
-          <a:p>
-            <a:pPr lvl="4"/>
-            <a:r>
-              <a:rPr lang="en-US"/>
-              <a:t>Fifth level</a:t>
-            </a:r>
-          </a:p>
-        </p:txBody>
-      </p:sp>
-      <p:sp>
-        <p:nvSpPr>
-          <p:cNvPr id="6" name="Footer Placeholder 5"/>
-          <p:cNvSpPr>
-            <a:spLocks noGrp="1"/>
-          </p:cNvSpPr>
-          <p:nvPr>
-            <p:ph type="ftr" sz="quarter" idx="4"/>
-          </p:nvPr>
-        </p:nvSpPr>
-        <p:spPr>
-          <a:xfrm>
-            <a:off x="0" y="8685213"/>
-            <a:ext cx="2971800" cy="458787"/>
-          </a:xfrm>
-          <a:prstGeom prst="rect">
-            <a:avLst/>
-          </a:prstGeom>
-        </p:spPr>
-        <p:txBody>
-          <a:bodyPr vert="horz" lIns="91440" tIns="45720" rIns="91440" bIns="45720" rtlCol="0" anchor="b"/>
-          <a:lstStyle>
-            <a:lvl1pPr algn="l">
-              <a:defRPr sz="1200"/>
-            </a:lvl1pPr>
-          </a:lstStyle>
-          <a:p>
-            <a:endParaRPr lang="en-US"/>
-          </a:p>
-        </p:txBody>
-      </p:sp>
-      <p:sp>
-        <p:nvSpPr>
-          <p:cNvPr id="7" name="Slide Number Placeholder 6"/>
-          <p:cNvSpPr>
-            <a:spLocks noGrp="1"/>
-          </p:cNvSpPr>
-          <p:nvPr>
-            <p:ph type="sldNum" sz="quarter" idx="5"/>
-          </p:nvPr>
-        </p:nvSpPr>
-        <p:spPr>
-          <a:xfrm>
-            <a:off x="3884613" y="8685213"/>
-            <a:ext cx="2971800" cy="458787"/>
-          </a:xfrm>
-          <a:prstGeom prst="rect">
-            <a:avLst/>
-          </a:prstGeom>
-        </p:spPr>
-        <p:txBody>
-          <a:bodyPr vert="horz" lIns="91440" tIns="45720" rIns="91440" bIns="45720" rtlCol="0" anchor="b"/>
-          <a:lstStyle>
-            <a:lvl1pPr algn="r">
-              <a:defRPr sz="1200"/>
-            </a:lvl1pPr>
-          </a:lstStyle>
-          <a:p>
-            <a:fld id="{CE5E9CC1-C706-0F49-92D6-E571CC5EEA8F}" type="slidenum">
-              <a:rPr lang="en-US"/>
-              <a:t>‹#›</a:t>
-            </a:fld>
-            <a:endParaRPr lang="en-US"/>
-          </a:p>
-        </p:txBody>
-      </p:sp>
     </p:spTree>
     <p:extLst>
       <p:ext uri="{BB962C8B-B14F-4D97-AF65-F5344CB8AC3E}">
-        <p14:creationId xmlns:p14="http://schemas.microsoft.com/office/powerpoint/2010/main" val="1024086991"/>
+        <p14:creationId xmlns:p14="http://schemas.microsoft.com/office/powerpoint/2010/main" val="549331182"/>
       </p:ext>
     </p:extLst>
   </p:cSld>
@@ -506,10 +287,6 @@
           <a:bodyPr/>
           <a:lstStyle/>
           <a:p>
-            <a:r>
-              <a:rPr lang="en-US" dirty="0"/>
-              <a:t/>
-            </a:r>
             <a:endParaRPr lang="en-US" dirty="0"/>
           </a:p>
         </p:txBody>
@@ -594,10 +371,6 @@
           <a:bodyPr/>
           <a:lstStyle/>
           <a:p>
-            <a:r>
-              <a:rPr lang="en-US" dirty="0"/>
-              <a:t/>
-            </a:r>
             <a:endParaRPr lang="en-US" dirty="0"/>
           </a:p>
         </p:txBody>
@@ -682,10 +455,6 @@
           <a:bodyPr/>
           <a:lstStyle/>
           <a:p>
-            <a:r>
-              <a:rPr lang="en-US" dirty="0"/>
-              <a:t/>
-            </a:r>
             <a:endParaRPr lang="en-US" dirty="0"/>
           </a:p>
         </p:txBody>
@@ -770,10 +539,6 @@
           <a:bodyPr/>
           <a:lstStyle/>
           <a:p>
-            <a:r>
-              <a:rPr lang="en-US" dirty="0"/>
-              <a:t/>
-            </a:r>
             <a:endParaRPr lang="en-US" dirty="0"/>
           </a:p>
         </p:txBody>
@@ -858,10 +623,6 @@
           <a:bodyPr/>
           <a:lstStyle/>
           <a:p>
-            <a:r>
-              <a:rPr lang="en-US" dirty="0"/>
-              <a:t/>
-            </a:r>
             <a:endParaRPr lang="en-US" dirty="0"/>
           </a:p>
         </p:txBody>
@@ -946,10 +707,6 @@
           <a:bodyPr/>
           <a:lstStyle/>
           <a:p>
-            <a:r>
-              <a:rPr lang="en-US" dirty="0"/>
-              <a:t/>
-            </a:r>
             <a:endParaRPr lang="en-US" dirty="0"/>
           </a:p>
         </p:txBody>
@@ -1034,10 +791,6 @@
           <a:bodyPr/>
           <a:lstStyle/>
           <a:p>
-            <a:r>
-              <a:rPr lang="en-US" dirty="0"/>
-              <a:t/>
-            </a:r>
             <a:endParaRPr lang="en-US" dirty="0"/>
           </a:p>
         </p:txBody>
@@ -1111,6 +864,11 @@
 <file path=ppt/slideMasters/slideMaster1.xml><?xml version="1.0" encoding="utf-8"?>
 <p:sldMaster xmlns:a="http://schemas.openxmlformats.org/drawingml/2006/main" xmlns:r="http://schemas.openxmlformats.org/officeDocument/2006/relationships" xmlns:p="http://schemas.openxmlformats.org/presentationml/2006/main">
   <p:cSld>
+    <p:bg>
+      <p:bgRef idx="1001">
+        <a:schemeClr val="bg1"/>
+      </p:bgRef>
+    </p:bg>
     <p:spTree>
       <p:nvGrpSpPr>
         <p:cNvPr id="1" name=""/>
@@ -1393,6 +1151,7 @@
         <a:solidFill>
           <a:srgbClr val="FFFFFF"/>
         </a:solidFill>
+        <a:effectLst/>
       </p:bgPr>
     </p:bg>
     <p:spTree>
@@ -1470,7 +1229,7 @@
             <a:off x="5669280" y="274320"/>
             <a:ext cx="3840480" cy="3840480"/>
           </a:xfrm>
-          <a:prstGeom prst="oval">
+          <a:prstGeom prst="line">
             <a:avLst/>
           </a:prstGeom>
           <a:solidFill>
@@ -1534,11 +1293,11 @@
           <a:bodyPr wrap="square" lIns="0" tIns="0" rIns="0" bIns="0" rtlCol="0" anchor="ctr"/>
           <a:lstStyle/>
           <a:p>
-            <a:pPr indent="0" marL="0">
-              <a:buNone/>
-            </a:pPr>
-            <a:r>
-              <a:rPr lang="en-US" sz="750" b="1" spc="100" kern="0" dirty="0">
+            <a:pPr marL="0" indent="0">
+              <a:buNone/>
+            </a:pPr>
+            <a:r>
+              <a:rPr lang="en-US" sz="750" b="1" kern="0" spc="100" dirty="0">
                 <a:solidFill>
                   <a:srgbClr val="1A5276"/>
                 </a:solidFill>
@@ -1573,7 +1332,7 @@
           <a:bodyPr wrap="square" lIns="0" tIns="0" rIns="0" bIns="0" rtlCol="0" anchor="ctr"/>
           <a:lstStyle/>
           <a:p>
-            <a:pPr indent="0" marL="0">
+            <a:pPr marL="0" indent="0">
               <a:lnSpc>
                 <a:spcPct val="108000"/>
               </a:lnSpc>
@@ -1593,7 +1352,7 @@
             <a:endParaRPr lang="en-US" sz="2800" dirty="0"/>
           </a:p>
           <a:p>
-            <a:pPr indent="0" marL="0">
+            <a:pPr marL="0" indent="0">
               <a:lnSpc>
                 <a:spcPct val="108000"/>
               </a:lnSpc>
@@ -1635,7 +1394,7 @@
           <a:bodyPr wrap="square" lIns="0" tIns="0" rIns="0" bIns="0" rtlCol="0" anchor="ctr"/>
           <a:lstStyle/>
           <a:p>
-            <a:pPr indent="0" marL="0">
+            <a:pPr marL="0" indent="0">
               <a:buNone/>
             </a:pPr>
             <a:r>
@@ -1697,7 +1456,7 @@
           <a:bodyPr wrap="square" lIns="0" tIns="0" rIns="0" bIns="0" rtlCol="0" anchor="ctr"/>
           <a:lstStyle/>
           <a:p>
-            <a:pPr indent="0" marL="0">
+            <a:pPr marL="0" indent="0">
               <a:buNone/>
             </a:pPr>
             <a:r>
@@ -1736,7 +1495,7 @@
           <a:bodyPr wrap="square" lIns="0" tIns="0" rIns="0" bIns="0" rtlCol="0" anchor="ctr"/>
           <a:lstStyle/>
           <a:p>
-            <a:pPr indent="0" marL="0">
+            <a:pPr marL="0" indent="0">
               <a:buNone/>
             </a:pPr>
             <a:r>
@@ -1775,7 +1534,7 @@
           <a:bodyPr wrap="square" lIns="0" tIns="0" rIns="0" bIns="0" rtlCol="0" anchor="ctr"/>
           <a:lstStyle/>
           <a:p>
-            <a:pPr indent="0" marL="0">
+            <a:pPr marL="0" indent="0">
               <a:buNone/>
             </a:pPr>
             <a:r>
@@ -1814,7 +1573,7 @@
           <a:bodyPr wrap="square" lIns="0" tIns="0" rIns="0" bIns="0" rtlCol="0" anchor="ctr"/>
           <a:lstStyle/>
           <a:p>
-            <a:pPr algn="ctr" indent="0" marL="0">
+            <a:pPr marL="0" indent="0" algn="ctr">
               <a:buNone/>
             </a:pPr>
             <a:r>
@@ -1850,6 +1609,7 @@
         <a:solidFill>
           <a:srgbClr val="FFFFFF"/>
         </a:solidFill>
+        <a:effectLst/>
       </p:bgPr>
     </p:bg>
     <p:spTree>
@@ -1937,7 +1697,7 @@
           <a:bodyPr wrap="square" lIns="0" tIns="0" rIns="0" bIns="0" rtlCol="0" anchor="ctr"/>
           <a:lstStyle/>
           <a:p>
-            <a:pPr indent="0" marL="0">
+            <a:pPr marL="0" indent="0">
               <a:buNone/>
             </a:pPr>
             <a:r>
@@ -1979,7 +1739,7 @@
             <a:prstDash val="solid"/>
           </a:ln>
           <a:effectLst>
-            <a:outerShdw sx="100000" sy="100000" kx="0" ky="0" algn="bl" rotWithShape="0" blurRad="101600" dist="38100" dir="8100000">
+            <a:outerShdw blurRad="101600" dist="38100" dir="8100000" algn="bl" rotWithShape="0">
               <a:srgbClr val="9EAFC0">
                 <a:alpha val="13000"/>
               </a:srgbClr>
@@ -2033,7 +1793,7 @@
           <a:bodyPr wrap="square" lIns="0" tIns="0" rIns="0" bIns="0" rtlCol="0" anchor="ctr"/>
           <a:lstStyle/>
           <a:p>
-            <a:pPr indent="0" marL="0">
+            <a:pPr marL="0" indent="0">
               <a:buNone/>
             </a:pPr>
             <a:r>
@@ -2072,7 +1832,7 @@
           <a:bodyPr wrap="square" lIns="0" tIns="0" rIns="0" bIns="0" rtlCol="0" anchor="ctr"/>
           <a:lstStyle/>
           <a:p>
-            <a:pPr indent="0" marL="0">
+            <a:pPr marL="0" indent="0">
               <a:buNone/>
             </a:pPr>
             <a:r>
@@ -2111,7 +1871,7 @@
           <a:bodyPr wrap="square" lIns="0" tIns="0" rIns="0" bIns="0" rtlCol="0" anchor="ctr"/>
           <a:lstStyle/>
           <a:p>
-            <a:pPr indent="0" marL="0">
+            <a:pPr marL="0" indent="0">
               <a:buNone/>
             </a:pPr>
             <a:r>
@@ -2153,7 +1913,7 @@
             <a:prstDash val="solid"/>
           </a:ln>
           <a:effectLst>
-            <a:outerShdw sx="100000" sy="100000" kx="0" ky="0" algn="bl" rotWithShape="0" blurRad="101600" dist="38100" dir="8100000">
+            <a:outerShdw blurRad="101600" dist="38100" dir="8100000" algn="bl" rotWithShape="0">
               <a:srgbClr val="9EAFC0">
                 <a:alpha val="13000"/>
               </a:srgbClr>
@@ -2207,7 +1967,7 @@
           <a:bodyPr wrap="square" lIns="0" tIns="0" rIns="0" bIns="0" rtlCol="0" anchor="ctr"/>
           <a:lstStyle/>
           <a:p>
-            <a:pPr indent="0" marL="0">
+            <a:pPr marL="0" indent="0">
               <a:buNone/>
             </a:pPr>
             <a:r>
@@ -2246,7 +2006,7 @@
           <a:bodyPr wrap="square" lIns="0" tIns="0" rIns="0" bIns="0" rtlCol="0" anchor="ctr"/>
           <a:lstStyle/>
           <a:p>
-            <a:pPr indent="0" marL="0">
+            <a:pPr marL="0" indent="0">
               <a:buNone/>
             </a:pPr>
             <a:r>
@@ -2285,7 +2045,7 @@
           <a:bodyPr wrap="square" lIns="0" tIns="0" rIns="0" bIns="0" rtlCol="0" anchor="ctr"/>
           <a:lstStyle/>
           <a:p>
-            <a:pPr indent="0" marL="0">
+            <a:pPr marL="0" indent="0">
               <a:buNone/>
             </a:pPr>
             <a:r>
@@ -2327,7 +2087,7 @@
             <a:prstDash val="solid"/>
           </a:ln>
           <a:effectLst>
-            <a:outerShdw sx="100000" sy="100000" kx="0" ky="0" algn="bl" rotWithShape="0" blurRad="101600" dist="38100" dir="8100000">
+            <a:outerShdw blurRad="101600" dist="38100" dir="8100000" algn="bl" rotWithShape="0">
               <a:srgbClr val="9EAFC0">
                 <a:alpha val="13000"/>
               </a:srgbClr>
@@ -2381,7 +2141,7 @@
           <a:bodyPr wrap="square" lIns="0" tIns="0" rIns="0" bIns="0" rtlCol="0" anchor="ctr"/>
           <a:lstStyle/>
           <a:p>
-            <a:pPr indent="0" marL="0">
+            <a:pPr marL="0" indent="0">
               <a:buNone/>
             </a:pPr>
             <a:r>
@@ -2420,7 +2180,7 @@
           <a:bodyPr wrap="square" lIns="0" tIns="0" rIns="0" bIns="0" rtlCol="0" anchor="ctr"/>
           <a:lstStyle/>
           <a:p>
-            <a:pPr indent="0" marL="0">
+            <a:pPr marL="0" indent="0">
               <a:buNone/>
             </a:pPr>
             <a:r>
@@ -2459,7 +2219,7 @@
           <a:bodyPr wrap="square" lIns="0" tIns="0" rIns="0" bIns="0" rtlCol="0" anchor="ctr"/>
           <a:lstStyle/>
           <a:p>
-            <a:pPr indent="0" marL="0">
+            <a:pPr marL="0" indent="0">
               <a:buNone/>
             </a:pPr>
             <a:r>
@@ -2501,7 +2261,7 @@
             <a:prstDash val="solid"/>
           </a:ln>
           <a:effectLst>
-            <a:outerShdw sx="100000" sy="100000" kx="0" ky="0" algn="bl" rotWithShape="0" blurRad="101600" dist="38100" dir="8100000">
+            <a:outerShdw blurRad="101600" dist="38100" dir="8100000" algn="bl" rotWithShape="0">
               <a:srgbClr val="9EAFC0">
                 <a:alpha val="13000"/>
               </a:srgbClr>
@@ -2555,7 +2315,7 @@
           <a:bodyPr wrap="square" lIns="0" tIns="0" rIns="0" bIns="0" rtlCol="0" anchor="ctr"/>
           <a:lstStyle/>
           <a:p>
-            <a:pPr indent="0" marL="0">
+            <a:pPr marL="0" indent="0">
               <a:buNone/>
             </a:pPr>
             <a:r>
@@ -2594,7 +2354,7 @@
           <a:bodyPr wrap="square" lIns="0" tIns="0" rIns="0" bIns="0" rtlCol="0" anchor="ctr"/>
           <a:lstStyle/>
           <a:p>
-            <a:pPr indent="0" marL="0">
+            <a:pPr marL="0" indent="0">
               <a:buNone/>
             </a:pPr>
             <a:r>
@@ -2633,7 +2393,7 @@
           <a:bodyPr wrap="square" lIns="0" tIns="0" rIns="0" bIns="0" rtlCol="0" anchor="ctr"/>
           <a:lstStyle/>
           <a:p>
-            <a:pPr indent="0" marL="0">
+            <a:pPr marL="0" indent="0">
               <a:buNone/>
             </a:pPr>
             <a:r>
@@ -2672,7 +2432,7 @@
           <a:bodyPr wrap="square" lIns="0" tIns="0" rIns="0" bIns="0" rtlCol="0" anchor="ctr"/>
           <a:lstStyle/>
           <a:p>
-            <a:pPr indent="0" marL="0">
+            <a:pPr marL="0" indent="0">
               <a:buNone/>
             </a:pPr>
             <a:r>
@@ -2736,7 +2496,7 @@
           <a:bodyPr wrap="square" lIns="0" tIns="0" rIns="0" bIns="0" rtlCol="0" anchor="ctr"/>
           <a:lstStyle/>
           <a:p>
-            <a:pPr indent="0" marL="0">
+            <a:pPr marL="0" indent="0">
               <a:lnSpc>
                 <a:spcPct val="115000"/>
               </a:lnSpc>
@@ -2756,7 +2516,7 @@
             <a:endParaRPr lang="en-US" sz="1200" dirty="0"/>
           </a:p>
           <a:p>
-            <a:pPr indent="0" marL="0">
+            <a:pPr marL="0" indent="0">
               <a:lnSpc>
                 <a:spcPct val="115000"/>
               </a:lnSpc>
@@ -2798,7 +2558,7 @@
           <a:bodyPr wrap="square" lIns="0" tIns="0" rIns="0" bIns="0" rtlCol="0" anchor="ctr"/>
           <a:lstStyle/>
           <a:p>
-            <a:pPr indent="0" marL="0">
+            <a:pPr marL="0" indent="0">
               <a:lnSpc>
                 <a:spcPct val="130000"/>
               </a:lnSpc>
@@ -2865,7 +2625,7 @@
           <a:bodyPr wrap="square" lIns="0" tIns="0" rIns="0" bIns="0" rtlCol="0" anchor="ctr"/>
           <a:lstStyle/>
           <a:p>
-            <a:pPr indent="0" marL="0">
+            <a:pPr marL="0" indent="0">
               <a:buNone/>
             </a:pPr>
             <a:r>
@@ -2899,6 +2659,7 @@
         <a:solidFill>
           <a:srgbClr val="F7FBFF"/>
         </a:solidFill>
+        <a:effectLst/>
       </p:bgPr>
     </p:bg>
     <p:spTree>
@@ -2961,7 +2722,7 @@
           <a:bodyPr wrap="square" lIns="0" tIns="0" rIns="0" bIns="0" rtlCol="0" anchor="ctr"/>
           <a:lstStyle/>
           <a:p>
-            <a:pPr indent="0" marL="0">
+            <a:pPr marL="0" indent="0">
               <a:buNone/>
             </a:pPr>
             <a:r>
@@ -3000,7 +2761,7 @@
           <a:bodyPr wrap="square" lIns="0" tIns="0" rIns="0" bIns="0" rtlCol="0" anchor="ctr"/>
           <a:lstStyle/>
           <a:p>
-            <a:pPr indent="0" marL="0">
+            <a:pPr marL="0" indent="0">
               <a:buNone/>
             </a:pPr>
             <a:r>
@@ -3039,7 +2800,7 @@
           <a:bodyPr wrap="square" lIns="0" tIns="0" rIns="0" bIns="0" rtlCol="0" anchor="ctr"/>
           <a:lstStyle/>
           <a:p>
-            <a:pPr indent="0" marL="0">
+            <a:pPr marL="0" indent="0">
               <a:buNone/>
             </a:pPr>
             <a:r>
@@ -3081,7 +2842,7 @@
             <a:prstDash val="solid"/>
           </a:ln>
           <a:effectLst>
-            <a:outerShdw sx="100000" sy="100000" kx="0" ky="0" algn="bl" rotWithShape="0" blurRad="101600" dist="38100" dir="8100000">
+            <a:outerShdw blurRad="101600" dist="38100" dir="8100000" algn="bl" rotWithShape="0">
               <a:srgbClr val="9EAFC0">
                 <a:alpha val="13000"/>
               </a:srgbClr>
@@ -3135,7 +2896,7 @@
           <a:bodyPr wrap="square" lIns="0" tIns="0" rIns="0" bIns="0" rtlCol="0" anchor="ctr"/>
           <a:lstStyle/>
           <a:p>
-            <a:pPr indent="0" marL="0">
+            <a:pPr marL="0" indent="0">
               <a:buNone/>
             </a:pPr>
             <a:r>
@@ -3199,7 +2960,7 @@
           <a:bodyPr wrap="square" lIns="0" tIns="0" rIns="0" bIns="0" rtlCol="0" anchor="ctr"/>
           <a:lstStyle/>
           <a:p>
-            <a:pPr indent="0" marL="0">
+            <a:pPr marL="0" indent="0">
               <a:buNone/>
             </a:pPr>
             <a:r>
@@ -3238,7 +2999,7 @@
           <a:bodyPr wrap="square" lIns="0" tIns="0" rIns="0" bIns="0" rtlCol="0" anchor="ctr"/>
           <a:lstStyle/>
           <a:p>
-            <a:pPr indent="0" marL="0">
+            <a:pPr marL="0" indent="0">
               <a:buNone/>
             </a:pPr>
             <a:r>
@@ -3255,7 +3016,7 @@
             <a:endParaRPr lang="en-US" sz="850" dirty="0"/>
           </a:p>
           <a:p>
-            <a:pPr indent="0" marL="0">
+            <a:pPr marL="0" indent="0">
               <a:buNone/>
             </a:pPr>
             <a:r>
@@ -3319,7 +3080,7 @@
           <a:bodyPr wrap="square" lIns="0" tIns="0" rIns="0" bIns="0" rtlCol="0" anchor="ctr"/>
           <a:lstStyle/>
           <a:p>
-            <a:pPr indent="0" marL="0">
+            <a:pPr marL="0" indent="0">
               <a:buNone/>
             </a:pPr>
             <a:r>
@@ -3358,7 +3119,7 @@
           <a:bodyPr wrap="square" lIns="0" tIns="0" rIns="0" bIns="0" rtlCol="0" anchor="ctr"/>
           <a:lstStyle/>
           <a:p>
-            <a:pPr indent="0" marL="0">
+            <a:pPr marL="0" indent="0">
               <a:buNone/>
             </a:pPr>
             <a:r>
@@ -3375,7 +3136,7 @@
             <a:endParaRPr lang="en-US" sz="850" dirty="0"/>
           </a:p>
           <a:p>
-            <a:pPr indent="0" marL="0">
+            <a:pPr marL="0" indent="0">
               <a:buNone/>
             </a:pPr>
             <a:r>
@@ -3439,7 +3200,7 @@
           <a:bodyPr wrap="square" lIns="0" tIns="0" rIns="0" bIns="0" rtlCol="0" anchor="ctr"/>
           <a:lstStyle/>
           <a:p>
-            <a:pPr indent="0" marL="0">
+            <a:pPr marL="0" indent="0">
               <a:buNone/>
             </a:pPr>
             <a:r>
@@ -3478,7 +3239,7 @@
           <a:bodyPr wrap="square" lIns="0" tIns="0" rIns="0" bIns="0" rtlCol="0" anchor="ctr"/>
           <a:lstStyle/>
           <a:p>
-            <a:pPr indent="0" marL="0">
+            <a:pPr marL="0" indent="0">
               <a:buNone/>
             </a:pPr>
             <a:r>
@@ -3542,7 +3303,7 @@
           <a:bodyPr wrap="square" lIns="0" tIns="0" rIns="0" bIns="0" rtlCol="0" anchor="ctr"/>
           <a:lstStyle/>
           <a:p>
-            <a:pPr indent="0" marL="0">
+            <a:pPr marL="0" indent="0">
               <a:buNone/>
             </a:pPr>
             <a:r>
@@ -3581,7 +3342,7 @@
           <a:bodyPr wrap="square" lIns="0" tIns="0" rIns="0" bIns="0" rtlCol="0" anchor="ctr"/>
           <a:lstStyle/>
           <a:p>
-            <a:pPr indent="0" marL="0">
+            <a:pPr marL="0" indent="0">
               <a:buNone/>
             </a:pPr>
             <a:r>
@@ -3645,7 +3406,7 @@
           <a:bodyPr wrap="square" lIns="0" tIns="0" rIns="0" bIns="0" rtlCol="0" anchor="ctr"/>
           <a:lstStyle/>
           <a:p>
-            <a:pPr indent="0" marL="0">
+            <a:pPr marL="0" indent="0">
               <a:buNone/>
             </a:pPr>
             <a:r>
@@ -3684,7 +3445,7 @@
           <a:bodyPr wrap="square" lIns="0" tIns="0" rIns="0" bIns="0" rtlCol="0" anchor="ctr"/>
           <a:lstStyle/>
           <a:p>
-            <a:pPr indent="0" marL="0">
+            <a:pPr marL="0" indent="0">
               <a:buNone/>
             </a:pPr>
             <a:r>
@@ -3726,7 +3487,7 @@
             <a:prstDash val="solid"/>
           </a:ln>
           <a:effectLst>
-            <a:outerShdw sx="100000" sy="100000" kx="0" ky="0" algn="bl" rotWithShape="0" blurRad="101600" dist="38100" dir="8100000">
+            <a:outerShdw blurRad="101600" dist="38100" dir="8100000" algn="bl" rotWithShape="0">
               <a:srgbClr val="9EAFC0">
                 <a:alpha val="13000"/>
               </a:srgbClr>
@@ -3780,7 +3541,7 @@
           <a:bodyPr wrap="square" lIns="0" tIns="0" rIns="0" bIns="0" rtlCol="0" anchor="ctr"/>
           <a:lstStyle/>
           <a:p>
-            <a:pPr indent="0" marL="0">
+            <a:pPr marL="0" indent="0">
               <a:buNone/>
             </a:pPr>
             <a:r>
@@ -3819,7 +3580,7 @@
           <a:bodyPr wrap="square" lIns="0" tIns="0" rIns="0" bIns="0" rtlCol="0" anchor="ctr"/>
           <a:lstStyle/>
           <a:p>
-            <a:pPr indent="0" marL="0">
+            <a:pPr marL="0" indent="0">
               <a:lnSpc>
                 <a:spcPct val="130000"/>
               </a:lnSpc>
@@ -3839,7 +3600,7 @@
             <a:endParaRPr lang="en-US" sz="1000" dirty="0"/>
           </a:p>
           <a:p>
-            <a:pPr indent="0" marL="0">
+            <a:pPr marL="0" indent="0">
               <a:lnSpc>
                 <a:spcPct val="130000"/>
               </a:lnSpc>
@@ -3859,7 +3620,7 @@
             <a:endParaRPr lang="en-US" sz="1000" dirty="0"/>
           </a:p>
           <a:p>
-            <a:pPr indent="0" marL="0">
+            <a:pPr marL="0" indent="0">
               <a:lnSpc>
                 <a:spcPct val="130000"/>
               </a:lnSpc>
@@ -3926,7 +3687,7 @@
           <a:bodyPr wrap="square" lIns="0" tIns="0" rIns="0" bIns="0" rtlCol="0" anchor="ctr"/>
           <a:lstStyle/>
           <a:p>
-            <a:pPr indent="0" marL="0">
+            <a:pPr marL="0" indent="0">
               <a:buNone/>
             </a:pPr>
             <a:r>
@@ -3965,7 +3726,7 @@
           <a:bodyPr wrap="square" lIns="0" tIns="0" rIns="0" bIns="0" rtlCol="0" anchor="ctr"/>
           <a:lstStyle/>
           <a:p>
-            <a:pPr indent="0" marL="0">
+            <a:pPr marL="0" indent="0">
               <a:buNone/>
             </a:pPr>
             <a:r>
@@ -4004,7 +3765,7 @@
           <a:bodyPr wrap="square" lIns="0" tIns="0" rIns="0" bIns="0" rtlCol="0" anchor="ctr"/>
           <a:lstStyle/>
           <a:p>
-            <a:pPr indent="0" marL="0">
+            <a:pPr marL="0" indent="0">
               <a:buNone/>
             </a:pPr>
             <a:r>
@@ -4043,7 +3804,7 @@
           <a:bodyPr wrap="square" lIns="0" tIns="0" rIns="0" bIns="0" rtlCol="0" anchor="ctr"/>
           <a:lstStyle/>
           <a:p>
-            <a:pPr indent="0" marL="0">
+            <a:pPr marL="0" indent="0">
               <a:buNone/>
             </a:pPr>
             <a:r>
@@ -4107,7 +3868,7 @@
           <a:bodyPr wrap="square" lIns="0" tIns="0" rIns="0" bIns="0" rtlCol="0" anchor="ctr"/>
           <a:lstStyle/>
           <a:p>
-            <a:pPr indent="0" marL="0">
+            <a:pPr marL="0" indent="0">
               <a:buNone/>
             </a:pPr>
             <a:r>
@@ -4146,7 +3907,7 @@
           <a:bodyPr wrap="square" lIns="0" tIns="0" rIns="0" bIns="0" rtlCol="0" anchor="ctr"/>
           <a:lstStyle/>
           <a:p>
-            <a:pPr indent="0" marL="0">
+            <a:pPr marL="0" indent="0">
               <a:buNone/>
             </a:pPr>
             <a:r>
@@ -4185,7 +3946,7 @@
           <a:bodyPr wrap="square" lIns="0" tIns="0" rIns="0" bIns="0" rtlCol="0" anchor="ctr"/>
           <a:lstStyle/>
           <a:p>
-            <a:pPr indent="0" marL="0">
+            <a:pPr marL="0" indent="0">
               <a:buNone/>
             </a:pPr>
             <a:r>
@@ -4224,7 +3985,7 @@
           <a:bodyPr wrap="square" lIns="0" tIns="0" rIns="0" bIns="0" rtlCol="0" anchor="ctr"/>
           <a:lstStyle/>
           <a:p>
-            <a:pPr indent="0" marL="0">
+            <a:pPr marL="0" indent="0">
               <a:buNone/>
             </a:pPr>
             <a:r>
@@ -4288,7 +4049,7 @@
           <a:bodyPr wrap="square" lIns="0" tIns="0" rIns="0" bIns="0" rtlCol="0" anchor="ctr"/>
           <a:lstStyle/>
           <a:p>
-            <a:pPr indent="0" marL="0">
+            <a:pPr marL="0" indent="0">
               <a:buNone/>
             </a:pPr>
             <a:r>
@@ -4327,7 +4088,7 @@
           <a:bodyPr wrap="square" lIns="0" tIns="0" rIns="0" bIns="0" rtlCol="0" anchor="ctr"/>
           <a:lstStyle/>
           <a:p>
-            <a:pPr indent="0" marL="0">
+            <a:pPr marL="0" indent="0">
               <a:buNone/>
             </a:pPr>
             <a:r>
@@ -4366,7 +4127,7 @@
           <a:bodyPr wrap="square" lIns="0" tIns="0" rIns="0" bIns="0" rtlCol="0" anchor="ctr"/>
           <a:lstStyle/>
           <a:p>
-            <a:pPr indent="0" marL="0">
+            <a:pPr marL="0" indent="0">
               <a:buNone/>
             </a:pPr>
             <a:r>
@@ -4405,7 +4166,7 @@
           <a:bodyPr wrap="square" lIns="0" tIns="0" rIns="0" bIns="0" rtlCol="0" anchor="ctr"/>
           <a:lstStyle/>
           <a:p>
-            <a:pPr indent="0" marL="0">
+            <a:pPr marL="0" indent="0">
               <a:buNone/>
             </a:pPr>
             <a:r>
@@ -4469,7 +4230,7 @@
           <a:bodyPr wrap="square" lIns="0" tIns="0" rIns="0" bIns="0" rtlCol="0" anchor="ctr"/>
           <a:lstStyle/>
           <a:p>
-            <a:pPr indent="0" marL="0">
+            <a:pPr marL="0" indent="0">
               <a:buNone/>
             </a:pPr>
             <a:r>
@@ -4503,6 +4264,7 @@
         <a:solidFill>
           <a:srgbClr val="FFFFFF"/>
         </a:solidFill>
+        <a:effectLst/>
       </p:bgPr>
     </p:bg>
     <p:spTree>
@@ -4590,7 +4352,7 @@
           <a:bodyPr wrap="square" lIns="0" tIns="0" rIns="0" bIns="0" rtlCol="0" anchor="ctr"/>
           <a:lstStyle/>
           <a:p>
-            <a:pPr indent="0" marL="0">
+            <a:pPr marL="0" indent="0">
               <a:buNone/>
             </a:pPr>
             <a:r>
@@ -4629,7 +4391,7 @@
           <a:bodyPr wrap="square" lIns="0" tIns="0" rIns="0" bIns="0" rtlCol="0" anchor="ctr"/>
           <a:lstStyle/>
           <a:p>
-            <a:pPr indent="0" marL="0">
+            <a:pPr marL="0" indent="0">
               <a:buNone/>
             </a:pPr>
             <a:r>
@@ -4668,7 +4430,7 @@
           <a:bodyPr wrap="square" lIns="0" tIns="0" rIns="0" bIns="0" rtlCol="0" anchor="ctr"/>
           <a:lstStyle/>
           <a:p>
-            <a:pPr indent="0" marL="0">
+            <a:pPr marL="0" indent="0">
               <a:buNone/>
             </a:pPr>
             <a:r>
@@ -4732,7 +4494,7 @@
           <a:bodyPr wrap="square" lIns="0" tIns="0" rIns="0" bIns="0" rtlCol="0" anchor="ctr"/>
           <a:lstStyle/>
           <a:p>
-            <a:pPr indent="0" marL="0">
+            <a:pPr marL="0" indent="0">
               <a:buNone/>
             </a:pPr>
             <a:r>
@@ -4796,7 +4558,7 @@
           <a:bodyPr wrap="square" lIns="0" tIns="0" rIns="0" bIns="0" rtlCol="0" anchor="ctr"/>
           <a:lstStyle/>
           <a:p>
-            <a:pPr indent="0" marL="0">
+            <a:pPr marL="0" indent="0">
               <a:buNone/>
             </a:pPr>
             <a:r>
@@ -4860,7 +4622,7 @@
           <a:bodyPr wrap="square" lIns="0" tIns="0" rIns="0" bIns="0" rtlCol="0" anchor="ctr"/>
           <a:lstStyle/>
           <a:p>
-            <a:pPr indent="0" marL="0">
+            <a:pPr marL="0" indent="0">
               <a:buNone/>
             </a:pPr>
             <a:r>
@@ -4924,7 +4686,7 @@
           <a:bodyPr wrap="square" lIns="0" tIns="0" rIns="0" bIns="0" rtlCol="0" anchor="ctr"/>
           <a:lstStyle/>
           <a:p>
-            <a:pPr indent="0" marL="0">
+            <a:pPr marL="0" indent="0">
               <a:buNone/>
             </a:pPr>
             <a:r>
@@ -5038,7 +4800,7 @@
           <a:bodyPr wrap="square" lIns="0" tIns="0" rIns="0" bIns="0" rtlCol="0" anchor="ctr"/>
           <a:lstStyle/>
           <a:p>
-            <a:pPr indent="0" marL="0">
+            <a:pPr marL="0" indent="0">
               <a:buNone/>
             </a:pPr>
             <a:r>
@@ -5077,7 +4839,7 @@
           <a:bodyPr wrap="square" lIns="0" tIns="0" rIns="0" bIns="0" rtlCol="0" anchor="ctr"/>
           <a:lstStyle/>
           <a:p>
-            <a:pPr indent="0" marL="0">
+            <a:pPr marL="0" indent="0">
               <a:buNone/>
             </a:pPr>
             <a:r>
@@ -5116,7 +4878,7 @@
           <a:bodyPr wrap="square" lIns="0" tIns="0" rIns="0" bIns="0" rtlCol="0" anchor="ctr"/>
           <a:lstStyle/>
           <a:p>
-            <a:pPr indent="0" marL="0">
+            <a:pPr marL="0" indent="0">
               <a:buNone/>
             </a:pPr>
             <a:r>
@@ -5230,7 +4992,7 @@
           <a:bodyPr wrap="square" lIns="0" tIns="0" rIns="0" bIns="0" rtlCol="0" anchor="ctr"/>
           <a:lstStyle/>
           <a:p>
-            <a:pPr indent="0" marL="0">
+            <a:pPr marL="0" indent="0">
               <a:buNone/>
             </a:pPr>
             <a:r>
@@ -5269,7 +5031,7 @@
           <a:bodyPr wrap="square" lIns="0" tIns="0" rIns="0" bIns="0" rtlCol="0" anchor="ctr"/>
           <a:lstStyle/>
           <a:p>
-            <a:pPr indent="0" marL="0">
+            <a:pPr marL="0" indent="0">
               <a:buNone/>
             </a:pPr>
             <a:r>
@@ -5308,7 +5070,7 @@
           <a:bodyPr wrap="square" lIns="0" tIns="0" rIns="0" bIns="0" rtlCol="0" anchor="ctr"/>
           <a:lstStyle/>
           <a:p>
-            <a:pPr indent="0" marL="0">
+            <a:pPr marL="0" indent="0">
               <a:buNone/>
             </a:pPr>
             <a:r>
@@ -5422,7 +5184,7 @@
           <a:bodyPr wrap="square" lIns="0" tIns="0" rIns="0" bIns="0" rtlCol="0" anchor="ctr"/>
           <a:lstStyle/>
           <a:p>
-            <a:pPr indent="0" marL="0">
+            <a:pPr marL="0" indent="0">
               <a:buNone/>
             </a:pPr>
             <a:r>
@@ -5461,7 +5223,7 @@
           <a:bodyPr wrap="square" lIns="0" tIns="0" rIns="0" bIns="0" rtlCol="0" anchor="ctr"/>
           <a:lstStyle/>
           <a:p>
-            <a:pPr indent="0" marL="0">
+            <a:pPr marL="0" indent="0">
               <a:buNone/>
             </a:pPr>
             <a:r>
@@ -5500,7 +5262,7 @@
           <a:bodyPr wrap="square" lIns="0" tIns="0" rIns="0" bIns="0" rtlCol="0" anchor="ctr"/>
           <a:lstStyle/>
           <a:p>
-            <a:pPr indent="0" marL="0">
+            <a:pPr marL="0" indent="0">
               <a:buNone/>
             </a:pPr>
             <a:r>
@@ -5614,7 +5376,7 @@
           <a:bodyPr wrap="square" lIns="0" tIns="0" rIns="0" bIns="0" rtlCol="0" anchor="ctr"/>
           <a:lstStyle/>
           <a:p>
-            <a:pPr indent="0" marL="0">
+            <a:pPr marL="0" indent="0">
               <a:buNone/>
             </a:pPr>
             <a:r>
@@ -5653,7 +5415,7 @@
           <a:bodyPr wrap="square" lIns="0" tIns="0" rIns="0" bIns="0" rtlCol="0" anchor="ctr"/>
           <a:lstStyle/>
           <a:p>
-            <a:pPr indent="0" marL="0">
+            <a:pPr marL="0" indent="0">
               <a:buNone/>
             </a:pPr>
             <a:r>
@@ -5692,7 +5454,7 @@
           <a:bodyPr wrap="square" lIns="0" tIns="0" rIns="0" bIns="0" rtlCol="0" anchor="ctr"/>
           <a:lstStyle/>
           <a:p>
-            <a:pPr indent="0" marL="0">
+            <a:pPr marL="0" indent="0">
               <a:buNone/>
             </a:pPr>
             <a:r>
@@ -5806,7 +5568,7 @@
           <a:bodyPr wrap="square" lIns="0" tIns="0" rIns="0" bIns="0" rtlCol="0" anchor="ctr"/>
           <a:lstStyle/>
           <a:p>
-            <a:pPr indent="0" marL="0">
+            <a:pPr marL="0" indent="0">
               <a:buNone/>
             </a:pPr>
             <a:r>
@@ -5845,7 +5607,7 @@
           <a:bodyPr wrap="square" lIns="0" tIns="0" rIns="0" bIns="0" rtlCol="0" anchor="ctr"/>
           <a:lstStyle/>
           <a:p>
-            <a:pPr indent="0" marL="0">
+            <a:pPr marL="0" indent="0">
               <a:buNone/>
             </a:pPr>
             <a:r>
@@ -5884,7 +5646,7 @@
           <a:bodyPr wrap="square" lIns="0" tIns="0" rIns="0" bIns="0" rtlCol="0" anchor="ctr"/>
           <a:lstStyle/>
           <a:p>
-            <a:pPr indent="0" marL="0">
+            <a:pPr marL="0" indent="0">
               <a:buNone/>
             </a:pPr>
             <a:r>
@@ -5998,7 +5760,7 @@
           <a:bodyPr wrap="square" lIns="0" tIns="0" rIns="0" bIns="0" rtlCol="0" anchor="ctr"/>
           <a:lstStyle/>
           <a:p>
-            <a:pPr indent="0" marL="0">
+            <a:pPr marL="0" indent="0">
               <a:buNone/>
             </a:pPr>
             <a:r>
@@ -6037,7 +5799,7 @@
           <a:bodyPr wrap="square" lIns="0" tIns="0" rIns="0" bIns="0" rtlCol="0" anchor="ctr"/>
           <a:lstStyle/>
           <a:p>
-            <a:pPr indent="0" marL="0">
+            <a:pPr marL="0" indent="0">
               <a:buNone/>
             </a:pPr>
             <a:r>
@@ -6076,7 +5838,7 @@
           <a:bodyPr wrap="square" lIns="0" tIns="0" rIns="0" bIns="0" rtlCol="0" anchor="ctr"/>
           <a:lstStyle/>
           <a:p>
-            <a:pPr indent="0" marL="0">
+            <a:pPr marL="0" indent="0">
               <a:buNone/>
             </a:pPr>
             <a:r>
@@ -6140,7 +5902,7 @@
           <a:bodyPr wrap="square" lIns="0" tIns="0" rIns="0" bIns="0" rtlCol="0" anchor="ctr"/>
           <a:lstStyle/>
           <a:p>
-            <a:pPr indent="0" marL="0">
+            <a:pPr marL="0" indent="0">
               <a:buNone/>
             </a:pPr>
             <a:r>
@@ -6204,7 +5966,7 @@
           <a:bodyPr wrap="square" lIns="0" tIns="0" rIns="0" bIns="0" rtlCol="0" anchor="ctr"/>
           <a:lstStyle/>
           <a:p>
-            <a:pPr indent="0" marL="0">
+            <a:pPr marL="0" indent="0">
               <a:buNone/>
             </a:pPr>
             <a:r>
@@ -6238,6 +6000,7 @@
         <a:solidFill>
           <a:srgbClr val="F7FBFF"/>
         </a:solidFill>
+        <a:effectLst/>
       </p:bgPr>
     </p:bg>
     <p:spTree>
@@ -6300,7 +6063,7 @@
           <a:bodyPr wrap="square" lIns="0" tIns="0" rIns="0" bIns="0" rtlCol="0" anchor="ctr"/>
           <a:lstStyle/>
           <a:p>
-            <a:pPr indent="0" marL="0">
+            <a:pPr marL="0" indent="0">
               <a:buNone/>
             </a:pPr>
             <a:r>
@@ -6339,7 +6102,7 @@
           <a:bodyPr wrap="square" lIns="0" tIns="0" rIns="0" bIns="0" rtlCol="0" anchor="ctr"/>
           <a:lstStyle/>
           <a:p>
-            <a:pPr indent="0" marL="0">
+            <a:pPr marL="0" indent="0">
               <a:buNone/>
             </a:pPr>
             <a:r>
@@ -6378,7 +6141,7 @@
           <a:bodyPr wrap="square" lIns="0" tIns="0" rIns="0" bIns="0" rtlCol="0" anchor="ctr"/>
           <a:lstStyle/>
           <a:p>
-            <a:pPr indent="0" marL="0">
+            <a:pPr marL="0" indent="0">
               <a:buNone/>
             </a:pPr>
             <a:r>
@@ -6442,7 +6205,7 @@
           <a:bodyPr wrap="square" lIns="0" tIns="0" rIns="0" bIns="0" rtlCol="0" anchor="ctr"/>
           <a:lstStyle/>
           <a:p>
-            <a:pPr indent="0" marL="0">
+            <a:pPr marL="0" indent="0">
               <a:buNone/>
             </a:pPr>
             <a:r>
@@ -6481,7 +6244,7 @@
           <a:bodyPr wrap="square" lIns="0" tIns="0" rIns="0" bIns="0" rtlCol="0" anchor="ctr"/>
           <a:lstStyle/>
           <a:p>
-            <a:pPr indent="0" marL="0">
+            <a:pPr marL="0" indent="0">
               <a:buNone/>
             </a:pPr>
             <a:r>
@@ -6520,7 +6283,7 @@
           <a:bodyPr wrap="square" lIns="0" tIns="0" rIns="0" bIns="0" rtlCol="0" anchor="ctr"/>
           <a:lstStyle/>
           <a:p>
-            <a:pPr indent="0" marL="0">
+            <a:pPr marL="0" indent="0">
               <a:buNone/>
             </a:pPr>
             <a:r>
@@ -6559,7 +6322,7 @@
           <a:bodyPr wrap="square" lIns="0" tIns="0" rIns="0" bIns="0" rtlCol="0" anchor="ctr"/>
           <a:lstStyle/>
           <a:p>
-            <a:pPr indent="0" marL="0">
+            <a:pPr marL="0" indent="0">
               <a:buNone/>
             </a:pPr>
             <a:r>
@@ -6601,7 +6364,7 @@
             <a:prstDash val="solid"/>
           </a:ln>
           <a:effectLst>
-            <a:outerShdw sx="100000" sy="100000" kx="0" ky="0" algn="bl" rotWithShape="0" blurRad="101600" dist="38100" dir="8100000">
+            <a:outerShdw blurRad="101600" dist="38100" dir="8100000" algn="bl" rotWithShape="0">
               <a:srgbClr val="9EAFC0">
                 <a:alpha val="13000"/>
               </a:srgbClr>
@@ -6655,7 +6418,7 @@
           <a:bodyPr wrap="square" lIns="0" tIns="0" rIns="0" bIns="0" rtlCol="0" anchor="ctr"/>
           <a:lstStyle/>
           <a:p>
-            <a:pPr indent="0" marL="0">
+            <a:pPr marL="0" indent="0">
               <a:buNone/>
             </a:pPr>
             <a:r>
@@ -6719,7 +6482,7 @@
           <a:bodyPr wrap="square" lIns="0" tIns="0" rIns="0" bIns="0" rtlCol="0" anchor="ctr"/>
           <a:lstStyle/>
           <a:p>
-            <a:pPr indent="0" marL="0">
+            <a:pPr marL="0" indent="0">
               <a:buNone/>
             </a:pPr>
             <a:r>
@@ -6783,7 +6546,7 @@
           <a:bodyPr wrap="square" lIns="0" tIns="0" rIns="0" bIns="0" rtlCol="0" anchor="ctr"/>
           <a:lstStyle/>
           <a:p>
-            <a:pPr indent="0" marL="0">
+            <a:pPr marL="0" indent="0">
               <a:buNone/>
             </a:pPr>
             <a:r>
@@ -6847,7 +6610,7 @@
           <a:bodyPr wrap="square" lIns="0" tIns="0" rIns="0" bIns="0" rtlCol="0" anchor="ctr"/>
           <a:lstStyle/>
           <a:p>
-            <a:pPr indent="0" marL="0">
+            <a:pPr marL="0" indent="0">
               <a:buNone/>
             </a:pPr>
             <a:r>
@@ -6911,7 +6674,7 @@
           <a:bodyPr wrap="square" lIns="0" tIns="0" rIns="0" bIns="0" rtlCol="0" anchor="ctr"/>
           <a:lstStyle/>
           <a:p>
-            <a:pPr indent="0" marL="0">
+            <a:pPr marL="0" indent="0">
               <a:buNone/>
             </a:pPr>
             <a:r>
@@ -6975,7 +6738,7 @@
           <a:bodyPr wrap="square" lIns="0" tIns="0" rIns="0" bIns="0" rtlCol="0" anchor="ctr"/>
           <a:lstStyle/>
           <a:p>
-            <a:pPr indent="0" marL="0">
+            <a:pPr marL="0" indent="0">
               <a:buNone/>
             </a:pPr>
             <a:r>
@@ -7139,7 +6902,7 @@
           <a:bodyPr wrap="square" lIns="0" tIns="0" rIns="0" bIns="0" rtlCol="0" anchor="ctr"/>
           <a:lstStyle/>
           <a:p>
-            <a:pPr indent="0" marL="0">
+            <a:pPr marL="0" indent="0">
               <a:buNone/>
             </a:pPr>
             <a:r>
@@ -7178,7 +6941,7 @@
           <a:bodyPr wrap="square" lIns="0" tIns="0" rIns="0" bIns="0" rtlCol="0" anchor="ctr"/>
           <a:lstStyle/>
           <a:p>
-            <a:pPr indent="0" marL="0">
+            <a:pPr marL="0" indent="0">
               <a:buNone/>
             </a:pPr>
             <a:r>
@@ -7217,7 +6980,7 @@
           <a:bodyPr wrap="square" lIns="0" tIns="0" rIns="0" bIns="0" rtlCol="0" anchor="ctr"/>
           <a:lstStyle/>
           <a:p>
-            <a:pPr indent="0" marL="0">
+            <a:pPr marL="0" indent="0">
               <a:buNone/>
             </a:pPr>
             <a:r>
@@ -7256,7 +7019,7 @@
           <a:bodyPr wrap="square" lIns="0" tIns="0" rIns="0" bIns="0" rtlCol="0" anchor="ctr"/>
           <a:lstStyle/>
           <a:p>
-            <a:pPr indent="0" marL="0">
+            <a:pPr marL="0" indent="0">
               <a:buNone/>
             </a:pPr>
             <a:r>
@@ -7295,7 +7058,7 @@
           <a:bodyPr wrap="square" lIns="0" tIns="0" rIns="0" bIns="0" rtlCol="0" anchor="ctr"/>
           <a:lstStyle/>
           <a:p>
-            <a:pPr indent="0" marL="0">
+            <a:pPr marL="0" indent="0">
               <a:buNone/>
             </a:pPr>
             <a:r>
@@ -7459,7 +7222,7 @@
           <a:bodyPr wrap="square" lIns="0" tIns="0" rIns="0" bIns="0" rtlCol="0" anchor="ctr"/>
           <a:lstStyle/>
           <a:p>
-            <a:pPr indent="0" marL="0">
+            <a:pPr marL="0" indent="0">
               <a:buNone/>
             </a:pPr>
             <a:r>
@@ -7498,7 +7261,7 @@
           <a:bodyPr wrap="square" lIns="0" tIns="0" rIns="0" bIns="0" rtlCol="0" anchor="ctr"/>
           <a:lstStyle/>
           <a:p>
-            <a:pPr indent="0" marL="0">
+            <a:pPr marL="0" indent="0">
               <a:buNone/>
             </a:pPr>
             <a:r>
@@ -7537,7 +7300,7 @@
           <a:bodyPr wrap="square" lIns="0" tIns="0" rIns="0" bIns="0" rtlCol="0" anchor="ctr"/>
           <a:lstStyle/>
           <a:p>
-            <a:pPr indent="0" marL="0">
+            <a:pPr marL="0" indent="0">
               <a:buNone/>
             </a:pPr>
             <a:r>
@@ -7576,7 +7339,7 @@
           <a:bodyPr wrap="square" lIns="0" tIns="0" rIns="0" bIns="0" rtlCol="0" anchor="ctr"/>
           <a:lstStyle/>
           <a:p>
-            <a:pPr indent="0" marL="0">
+            <a:pPr marL="0" indent="0">
               <a:buNone/>
             </a:pPr>
             <a:r>
@@ -7615,7 +7378,7 @@
           <a:bodyPr wrap="square" lIns="0" tIns="0" rIns="0" bIns="0" rtlCol="0" anchor="ctr"/>
           <a:lstStyle/>
           <a:p>
-            <a:pPr indent="0" marL="0">
+            <a:pPr marL="0" indent="0">
               <a:buNone/>
             </a:pPr>
             <a:r>
@@ -7779,7 +7542,7 @@
           <a:bodyPr wrap="square" lIns="0" tIns="0" rIns="0" bIns="0" rtlCol="0" anchor="ctr"/>
           <a:lstStyle/>
           <a:p>
-            <a:pPr indent="0" marL="0">
+            <a:pPr marL="0" indent="0">
               <a:buNone/>
             </a:pPr>
             <a:r>
@@ -7818,7 +7581,7 @@
           <a:bodyPr wrap="square" lIns="0" tIns="0" rIns="0" bIns="0" rtlCol="0" anchor="ctr"/>
           <a:lstStyle/>
           <a:p>
-            <a:pPr indent="0" marL="0">
+            <a:pPr marL="0" indent="0">
               <a:buNone/>
             </a:pPr>
             <a:r>
@@ -7857,7 +7620,7 @@
           <a:bodyPr wrap="square" lIns="0" tIns="0" rIns="0" bIns="0" rtlCol="0" anchor="ctr"/>
           <a:lstStyle/>
           <a:p>
-            <a:pPr indent="0" marL="0">
+            <a:pPr marL="0" indent="0">
               <a:buNone/>
             </a:pPr>
             <a:r>
@@ -7896,7 +7659,7 @@
           <a:bodyPr wrap="square" lIns="0" tIns="0" rIns="0" bIns="0" rtlCol="0" anchor="ctr"/>
           <a:lstStyle/>
           <a:p>
-            <a:pPr indent="0" marL="0">
+            <a:pPr marL="0" indent="0">
               <a:buNone/>
             </a:pPr>
             <a:r>
@@ -7935,7 +7698,7 @@
           <a:bodyPr wrap="square" lIns="0" tIns="0" rIns="0" bIns="0" rtlCol="0" anchor="ctr"/>
           <a:lstStyle/>
           <a:p>
-            <a:pPr indent="0" marL="0">
+            <a:pPr marL="0" indent="0">
               <a:buNone/>
             </a:pPr>
             <a:r>
@@ -8099,7 +7862,7 @@
           <a:bodyPr wrap="square" lIns="0" tIns="0" rIns="0" bIns="0" rtlCol="0" anchor="ctr"/>
           <a:lstStyle/>
           <a:p>
-            <a:pPr indent="0" marL="0">
+            <a:pPr marL="0" indent="0">
               <a:buNone/>
             </a:pPr>
             <a:r>
@@ -8138,7 +7901,7 @@
           <a:bodyPr wrap="square" lIns="0" tIns="0" rIns="0" bIns="0" rtlCol="0" anchor="ctr"/>
           <a:lstStyle/>
           <a:p>
-            <a:pPr indent="0" marL="0">
+            <a:pPr marL="0" indent="0">
               <a:buNone/>
             </a:pPr>
             <a:r>
@@ -8177,7 +7940,7 @@
           <a:bodyPr wrap="square" lIns="0" tIns="0" rIns="0" bIns="0" rtlCol="0" anchor="ctr"/>
           <a:lstStyle/>
           <a:p>
-            <a:pPr indent="0" marL="0">
+            <a:pPr marL="0" indent="0">
               <a:buNone/>
             </a:pPr>
             <a:r>
@@ -8216,7 +7979,7 @@
           <a:bodyPr wrap="square" lIns="0" tIns="0" rIns="0" bIns="0" rtlCol="0" anchor="ctr"/>
           <a:lstStyle/>
           <a:p>
-            <a:pPr indent="0" marL="0">
+            <a:pPr marL="0" indent="0">
               <a:buNone/>
             </a:pPr>
             <a:r>
@@ -8255,7 +8018,7 @@
           <a:bodyPr wrap="square" lIns="0" tIns="0" rIns="0" bIns="0" rtlCol="0" anchor="ctr"/>
           <a:lstStyle/>
           <a:p>
-            <a:pPr indent="0" marL="0">
+            <a:pPr marL="0" indent="0">
               <a:buNone/>
             </a:pPr>
             <a:r>
@@ -8297,7 +8060,7 @@
             <a:prstDash val="solid"/>
           </a:ln>
           <a:effectLst>
-            <a:outerShdw sx="100000" sy="100000" kx="0" ky="0" algn="bl" rotWithShape="0" blurRad="101600" dist="38100" dir="8100000">
+            <a:outerShdw blurRad="101600" dist="38100" dir="8100000" algn="bl" rotWithShape="0">
               <a:srgbClr val="9EAFC0">
                 <a:alpha val="13000"/>
               </a:srgbClr>
@@ -8351,7 +8114,7 @@
           <a:bodyPr wrap="square" lIns="0" tIns="0" rIns="0" bIns="0" rtlCol="0" anchor="ctr"/>
           <a:lstStyle/>
           <a:p>
-            <a:pPr indent="0" marL="0">
+            <a:pPr marL="0" indent="0">
               <a:buNone/>
             </a:pPr>
             <a:r>
@@ -8415,7 +8178,7 @@
           <a:bodyPr wrap="square" lIns="0" tIns="0" rIns="0" bIns="0" rtlCol="0" anchor="ctr"/>
           <a:lstStyle/>
           <a:p>
-            <a:pPr indent="0" marL="0">
+            <a:pPr marL="0" indent="0">
               <a:buNone/>
             </a:pPr>
             <a:r>
@@ -8454,7 +8217,7 @@
           <a:bodyPr wrap="square" lIns="0" tIns="0" rIns="0" bIns="0" rtlCol="0" anchor="ctr"/>
           <a:lstStyle/>
           <a:p>
-            <a:pPr indent="0" marL="0">
+            <a:pPr marL="0" indent="0">
               <a:buNone/>
             </a:pPr>
             <a:r>
@@ -8493,7 +8256,7 @@
           <a:bodyPr wrap="square" lIns="0" tIns="0" rIns="0" bIns="0" rtlCol="0" anchor="ctr"/>
           <a:lstStyle/>
           <a:p>
-            <a:pPr indent="0" marL="0">
+            <a:pPr marL="0" indent="0">
               <a:buNone/>
             </a:pPr>
             <a:r>
@@ -8557,7 +8320,7 @@
           <a:bodyPr wrap="square" lIns="0" tIns="0" rIns="0" bIns="0" rtlCol="0" anchor="ctr"/>
           <a:lstStyle/>
           <a:p>
-            <a:pPr indent="0" marL="0">
+            <a:pPr marL="0" indent="0">
               <a:buNone/>
             </a:pPr>
             <a:r>
@@ -8596,7 +8359,7 @@
           <a:bodyPr wrap="square" lIns="0" tIns="0" rIns="0" bIns="0" rtlCol="0" anchor="ctr"/>
           <a:lstStyle/>
           <a:p>
-            <a:pPr indent="0" marL="0">
+            <a:pPr marL="0" indent="0">
               <a:buNone/>
             </a:pPr>
             <a:r>
@@ -8635,7 +8398,7 @@
           <a:bodyPr wrap="square" lIns="0" tIns="0" rIns="0" bIns="0" rtlCol="0" anchor="ctr"/>
           <a:lstStyle/>
           <a:p>
-            <a:pPr indent="0" marL="0">
+            <a:pPr marL="0" indent="0">
               <a:buNone/>
             </a:pPr>
             <a:r>
@@ -8699,7 +8462,7 @@
           <a:bodyPr wrap="square" lIns="0" tIns="0" rIns="0" bIns="0" rtlCol="0" anchor="ctr"/>
           <a:lstStyle/>
           <a:p>
-            <a:pPr indent="0" marL="0">
+            <a:pPr marL="0" indent="0">
               <a:buNone/>
             </a:pPr>
             <a:r>
@@ -8738,7 +8501,7 @@
           <a:bodyPr wrap="square" lIns="0" tIns="0" rIns="0" bIns="0" rtlCol="0" anchor="ctr"/>
           <a:lstStyle/>
           <a:p>
-            <a:pPr indent="0" marL="0">
+            <a:pPr marL="0" indent="0">
               <a:buNone/>
             </a:pPr>
             <a:r>
@@ -8777,7 +8540,7 @@
           <a:bodyPr wrap="square" lIns="0" tIns="0" rIns="0" bIns="0" rtlCol="0" anchor="ctr"/>
           <a:lstStyle/>
           <a:p>
-            <a:pPr indent="0" marL="0">
+            <a:pPr marL="0" indent="0">
               <a:buNone/>
             </a:pPr>
             <a:r>
@@ -8841,7 +8604,7 @@
           <a:bodyPr wrap="square" lIns="0" tIns="0" rIns="0" bIns="0" rtlCol="0" anchor="ctr"/>
           <a:lstStyle/>
           <a:p>
-            <a:pPr indent="0" marL="0">
+            <a:pPr marL="0" indent="0">
               <a:buNone/>
             </a:pPr>
             <a:r>
@@ -8880,7 +8643,7 @@
           <a:bodyPr wrap="square" lIns="0" tIns="0" rIns="0" bIns="0" rtlCol="0" anchor="ctr"/>
           <a:lstStyle/>
           <a:p>
-            <a:pPr indent="0" marL="0">
+            <a:pPr marL="0" indent="0">
               <a:lnSpc>
                 <a:spcPct val="125000"/>
               </a:lnSpc>
@@ -8947,7 +8710,7 @@
           <a:bodyPr wrap="square" lIns="0" tIns="0" rIns="0" bIns="0" rtlCol="0" anchor="ctr"/>
           <a:lstStyle/>
           <a:p>
-            <a:pPr indent="0" marL="0">
+            <a:pPr marL="0" indent="0">
               <a:buNone/>
             </a:pPr>
             <a:r>
@@ -8981,6 +8744,7 @@
         <a:solidFill>
           <a:srgbClr val="1A2B3C"/>
         </a:solidFill>
+        <a:effectLst/>
       </p:bgPr>
     </p:bg>
     <p:spTree>
@@ -9033,7 +8797,7 @@
             <a:off x="237744" y="137160"/>
             <a:ext cx="155448" cy="155448"/>
           </a:xfrm>
-          <a:prstGeom prst="oval">
+          <a:prstGeom prst="line">
             <a:avLst/>
           </a:prstGeom>
           <a:solidFill>
@@ -9058,7 +8822,7 @@
             <a:off x="512064" y="137160"/>
             <a:ext cx="155448" cy="155448"/>
           </a:xfrm>
-          <a:prstGeom prst="oval">
+          <a:prstGeom prst="line">
             <a:avLst/>
           </a:prstGeom>
           <a:solidFill>
@@ -9083,7 +8847,7 @@
             <a:off x="786384" y="137160"/>
             <a:ext cx="155448" cy="155448"/>
           </a:xfrm>
-          <a:prstGeom prst="oval">
+          <a:prstGeom prst="line">
             <a:avLst/>
           </a:prstGeom>
           <a:solidFill>
@@ -9118,7 +8882,7 @@
           <a:bodyPr wrap="square" lIns="0" tIns="0" rIns="0" bIns="0" rtlCol="0" anchor="ctr"/>
           <a:lstStyle/>
           <a:p>
-            <a:pPr algn="ctr" indent="0" marL="0">
+            <a:pPr marL="0" indent="0" algn="ctr">
               <a:buNone/>
             </a:pPr>
             <a:r>
@@ -9207,7 +8971,7 @@
           <a:bodyPr wrap="square" lIns="0" tIns="0" rIns="0" bIns="0" rtlCol="0" anchor="ctr"/>
           <a:lstStyle/>
           <a:p>
-            <a:pPr indent="0" marL="0">
+            <a:pPr marL="0" indent="0">
               <a:buNone/>
             </a:pPr>
             <a:r>
@@ -9246,7 +9010,7 @@
           <a:bodyPr wrap="square" lIns="0" tIns="0" rIns="0" bIns="0" rtlCol="0" anchor="ctr"/>
           <a:lstStyle/>
           <a:p>
-            <a:pPr indent="0" marL="0">
+            <a:pPr marL="0" indent="0">
               <a:buNone/>
             </a:pPr>
             <a:r>
@@ -9285,7 +9049,7 @@
           <a:bodyPr wrap="square" lIns="0" tIns="0" rIns="0" bIns="0" rtlCol="0" anchor="ctr"/>
           <a:lstStyle/>
           <a:p>
-            <a:pPr indent="0" marL="0">
+            <a:pPr marL="0" indent="0">
               <a:buNone/>
             </a:pPr>
             <a:r>
@@ -9324,7 +9088,7 @@
           <a:bodyPr wrap="square" lIns="0" tIns="0" rIns="0" bIns="0" rtlCol="0" anchor="ctr"/>
           <a:lstStyle/>
           <a:p>
-            <a:pPr indent="0" marL="0">
+            <a:pPr marL="0" indent="0">
               <a:buNone/>
             </a:pPr>
             <a:r>
@@ -9363,7 +9127,7 @@
           <a:bodyPr wrap="square" lIns="0" tIns="0" rIns="0" bIns="0" rtlCol="0" anchor="ctr"/>
           <a:lstStyle/>
           <a:p>
-            <a:pPr indent="0" marL="0">
+            <a:pPr marL="0" indent="0">
               <a:buNone/>
             </a:pPr>
             <a:r>
@@ -9402,7 +9166,7 @@
           <a:bodyPr wrap="square" lIns="0" tIns="0" rIns="0" bIns="0" rtlCol="0" anchor="ctr"/>
           <a:lstStyle/>
           <a:p>
-            <a:pPr indent="0" marL="0">
+            <a:pPr marL="0" indent="0">
               <a:buNone/>
             </a:pPr>
             <a:r>
@@ -9441,7 +9205,7 @@
           <a:bodyPr wrap="square" lIns="0" tIns="0" rIns="0" bIns="0" rtlCol="0" anchor="ctr"/>
           <a:lstStyle/>
           <a:p>
-            <a:pPr indent="0" marL="0">
+            <a:pPr marL="0" indent="0">
               <a:buNone/>
             </a:pPr>
             <a:r>
@@ -9480,7 +9244,7 @@
           <a:bodyPr wrap="square" lIns="0" tIns="0" rIns="0" bIns="0" rtlCol="0" anchor="ctr"/>
           <a:lstStyle/>
           <a:p>
-            <a:pPr indent="0" marL="0">
+            <a:pPr marL="0" indent="0">
               <a:buNone/>
             </a:pPr>
             <a:r>
@@ -9569,7 +9333,7 @@
           <a:bodyPr wrap="square" lIns="0" tIns="0" rIns="0" bIns="0" rtlCol="0" anchor="ctr"/>
           <a:lstStyle/>
           <a:p>
-            <a:pPr indent="0" marL="0">
+            <a:pPr marL="0" indent="0">
               <a:buNone/>
             </a:pPr>
             <a:r>
@@ -9608,7 +9372,7 @@
           <a:bodyPr wrap="square" lIns="0" tIns="0" rIns="0" bIns="0" rtlCol="0" anchor="ctr"/>
           <a:lstStyle/>
           <a:p>
-            <a:pPr indent="0" marL="0">
+            <a:pPr marL="0" indent="0">
               <a:buNone/>
             </a:pPr>
             <a:r>
@@ -9647,7 +9411,7 @@
           <a:bodyPr wrap="square" lIns="0" tIns="0" rIns="0" bIns="0" rtlCol="0" anchor="ctr"/>
           <a:lstStyle/>
           <a:p>
-            <a:pPr indent="0" marL="0">
+            <a:pPr marL="0" indent="0">
               <a:buNone/>
             </a:pPr>
             <a:r>
@@ -9686,7 +9450,7 @@
           <a:bodyPr wrap="square" lIns="0" tIns="0" rIns="0" bIns="0" rtlCol="0" anchor="ctr"/>
           <a:lstStyle/>
           <a:p>
-            <a:pPr indent="0" marL="0">
+            <a:pPr marL="0" indent="0">
               <a:buNone/>
             </a:pPr>
             <a:r>
@@ -9725,7 +9489,7 @@
           <a:bodyPr wrap="square" lIns="0" tIns="0" rIns="0" bIns="0" rtlCol="0" anchor="ctr"/>
           <a:lstStyle/>
           <a:p>
-            <a:pPr indent="0" marL="0">
+            <a:pPr marL="0" indent="0">
               <a:buNone/>
             </a:pPr>
             <a:r>
@@ -9764,7 +9528,7 @@
           <a:bodyPr wrap="square" lIns="0" tIns="0" rIns="0" bIns="0" rtlCol="0" anchor="ctr"/>
           <a:lstStyle/>
           <a:p>
-            <a:pPr indent="0" marL="0">
+            <a:pPr marL="0" indent="0">
               <a:buNone/>
             </a:pPr>
             <a:r>
@@ -9803,7 +9567,7 @@
           <a:bodyPr wrap="square" lIns="0" tIns="0" rIns="0" bIns="0" rtlCol="0" anchor="ctr"/>
           <a:lstStyle/>
           <a:p>
-            <a:pPr indent="0" marL="0">
+            <a:pPr marL="0" indent="0">
               <a:buNone/>
             </a:pPr>
             <a:r>
@@ -9842,7 +9606,7 @@
           <a:bodyPr wrap="square" lIns="0" tIns="0" rIns="0" bIns="0" rtlCol="0" anchor="ctr"/>
           <a:lstStyle/>
           <a:p>
-            <a:pPr indent="0" marL="0">
+            <a:pPr marL="0" indent="0">
               <a:buNone/>
             </a:pPr>
             <a:r>
@@ -9931,7 +9695,7 @@
           <a:bodyPr wrap="square" lIns="0" tIns="0" rIns="0" bIns="0" rtlCol="0" anchor="ctr"/>
           <a:lstStyle/>
           <a:p>
-            <a:pPr indent="0" marL="0">
+            <a:pPr marL="0" indent="0">
               <a:buNone/>
             </a:pPr>
             <a:r>
@@ -9970,7 +9734,7 @@
           <a:bodyPr wrap="square" lIns="0" tIns="0" rIns="0" bIns="0" rtlCol="0" anchor="ctr"/>
           <a:lstStyle/>
           <a:p>
-            <a:pPr indent="0" marL="0">
+            <a:pPr marL="0" indent="0">
               <a:buNone/>
             </a:pPr>
             <a:r>
@@ -10009,7 +9773,7 @@
           <a:bodyPr wrap="square" lIns="0" tIns="0" rIns="0" bIns="0" rtlCol="0" anchor="ctr"/>
           <a:lstStyle/>
           <a:p>
-            <a:pPr indent="0" marL="0">
+            <a:pPr marL="0" indent="0">
               <a:buNone/>
             </a:pPr>
             <a:r>
@@ -10048,7 +9812,7 @@
           <a:bodyPr wrap="square" lIns="0" tIns="0" rIns="0" bIns="0" rtlCol="0" anchor="ctr"/>
           <a:lstStyle/>
           <a:p>
-            <a:pPr indent="0" marL="0">
+            <a:pPr marL="0" indent="0">
               <a:buNone/>
             </a:pPr>
             <a:r>
@@ -10087,7 +9851,7 @@
           <a:bodyPr wrap="square" lIns="0" tIns="0" rIns="0" bIns="0" rtlCol="0" anchor="ctr"/>
           <a:lstStyle/>
           <a:p>
-            <a:pPr indent="0" marL="0">
+            <a:pPr marL="0" indent="0">
               <a:buNone/>
             </a:pPr>
             <a:r>
@@ -10126,7 +9890,7 @@
           <a:bodyPr wrap="square" lIns="0" tIns="0" rIns="0" bIns="0" rtlCol="0" anchor="ctr"/>
           <a:lstStyle/>
           <a:p>
-            <a:pPr indent="0" marL="0">
+            <a:pPr marL="0" indent="0">
               <a:buNone/>
             </a:pPr>
             <a:r>
@@ -10165,7 +9929,7 @@
           <a:bodyPr wrap="square" lIns="0" tIns="0" rIns="0" bIns="0" rtlCol="0" anchor="ctr"/>
           <a:lstStyle/>
           <a:p>
-            <a:pPr indent="0" marL="0">
+            <a:pPr marL="0" indent="0">
               <a:buNone/>
             </a:pPr>
             <a:r>
@@ -10204,7 +9968,7 @@
           <a:bodyPr wrap="square" lIns="0" tIns="0" rIns="0" bIns="0" rtlCol="0" anchor="ctr"/>
           <a:lstStyle/>
           <a:p>
-            <a:pPr indent="0" marL="0">
+            <a:pPr marL="0" indent="0">
               <a:buNone/>
             </a:pPr>
             <a:r>
@@ -10243,7 +10007,7 @@
           <a:bodyPr wrap="square" lIns="0" tIns="0" rIns="0" bIns="0" rtlCol="0" anchor="ctr"/>
           <a:lstStyle/>
           <a:p>
-            <a:pPr indent="0" marL="0">
+            <a:pPr marL="0" indent="0">
               <a:buNone/>
             </a:pPr>
             <a:r>
@@ -10277,6 +10041,7 @@
         <a:solidFill>
           <a:srgbClr val="FFFFFF"/>
         </a:solidFill>
+        <a:effectLst/>
       </p:bgPr>
     </p:bg>
     <p:spTree>
@@ -10354,7 +10119,7 @@
             <a:off x="91440" y="2651760"/>
             <a:ext cx="3566160" cy="3566160"/>
           </a:xfrm>
-          <a:prstGeom prst="oval">
+          <a:prstGeom prst="line">
             <a:avLst/>
           </a:prstGeom>
           <a:solidFill>
@@ -10393,7 +10158,7 @@
           <a:bodyPr wrap="square" lIns="0" tIns="0" rIns="0" bIns="0" rtlCol="0" anchor="ctr"/>
           <a:lstStyle/>
           <a:p>
-            <a:pPr indent="0" marL="0">
+            <a:pPr marL="0" indent="0">
               <a:lnSpc>
                 <a:spcPct val="108000"/>
               </a:lnSpc>
@@ -10413,7 +10178,7 @@
             <a:endParaRPr lang="en-US" sz="3200" dirty="0"/>
           </a:p>
           <a:p>
-            <a:pPr indent="0" marL="0">
+            <a:pPr marL="0" indent="0">
               <a:lnSpc>
                 <a:spcPct val="108000"/>
               </a:lnSpc>
@@ -10478,7 +10243,7 @@
           <a:bodyPr wrap="square" lIns="0" tIns="0" rIns="0" bIns="0" rtlCol="0" anchor="ctr"/>
           <a:lstStyle/>
           <a:p>
-            <a:pPr indent="0" marL="0">
+            <a:pPr marL="0" indent="0">
               <a:buNone/>
             </a:pPr>
             <a:r>
@@ -10517,7 +10282,7 @@
           <a:bodyPr wrap="square" lIns="0" tIns="0" rIns="0" bIns="0" rtlCol="0" anchor="ctr"/>
           <a:lstStyle/>
           <a:p>
-            <a:pPr indent="0" marL="0">
+            <a:pPr marL="0" indent="0">
               <a:buNone/>
             </a:pPr>
             <a:r>
@@ -10569,7 +10334,7 @@
             <a:off x="4069080" y="978408"/>
             <a:ext cx="146304" cy="146304"/>
           </a:xfrm>
-          <a:prstGeom prst="oval">
+          <a:prstGeom prst="line">
             <a:avLst/>
           </a:prstGeom>
           <a:solidFill>
@@ -10604,7 +10369,7 @@
           <a:bodyPr wrap="square" lIns="0" tIns="0" rIns="0" bIns="0" rtlCol="0" anchor="ctr"/>
           <a:lstStyle/>
           <a:p>
-            <a:pPr indent="0" marL="0">
+            <a:pPr marL="0" indent="0">
               <a:buNone/>
             </a:pPr>
             <a:r>
@@ -10633,7 +10398,7 @@
             <a:off x="4069080" y="1453896"/>
             <a:ext cx="146304" cy="146304"/>
           </a:xfrm>
-          <a:prstGeom prst="oval">
+          <a:prstGeom prst="line">
             <a:avLst/>
           </a:prstGeom>
           <a:solidFill>
@@ -10668,7 +10433,7 @@
           <a:bodyPr wrap="square" lIns="0" tIns="0" rIns="0" bIns="0" rtlCol="0" anchor="ctr"/>
           <a:lstStyle/>
           <a:p>
-            <a:pPr indent="0" marL="0">
+            <a:pPr marL="0" indent="0">
               <a:buNone/>
             </a:pPr>
             <a:r>
@@ -10697,7 +10462,7 @@
             <a:off x="4069080" y="1929384"/>
             <a:ext cx="146304" cy="146304"/>
           </a:xfrm>
-          <a:prstGeom prst="oval">
+          <a:prstGeom prst="line">
             <a:avLst/>
           </a:prstGeom>
           <a:solidFill>
@@ -10732,7 +10497,7 @@
           <a:bodyPr wrap="square" lIns="0" tIns="0" rIns="0" bIns="0" rtlCol="0" anchor="ctr"/>
           <a:lstStyle/>
           <a:p>
-            <a:pPr indent="0" marL="0">
+            <a:pPr marL="0" indent="0">
               <a:buNone/>
             </a:pPr>
             <a:r>
@@ -10761,7 +10526,7 @@
             <a:off x="4069080" y="2404872"/>
             <a:ext cx="146304" cy="146304"/>
           </a:xfrm>
-          <a:prstGeom prst="oval">
+          <a:prstGeom prst="line">
             <a:avLst/>
           </a:prstGeom>
           <a:solidFill>
@@ -10796,7 +10561,7 @@
           <a:bodyPr wrap="square" lIns="0" tIns="0" rIns="0" bIns="0" rtlCol="0" anchor="ctr"/>
           <a:lstStyle/>
           <a:p>
-            <a:pPr indent="0" marL="0">
+            <a:pPr marL="0" indent="0">
               <a:buNone/>
             </a:pPr>
             <a:r>
@@ -10825,7 +10590,7 @@
             <a:off x="4069080" y="2880360"/>
             <a:ext cx="146304" cy="146304"/>
           </a:xfrm>
-          <a:prstGeom prst="oval">
+          <a:prstGeom prst="line">
             <a:avLst/>
           </a:prstGeom>
           <a:solidFill>
@@ -10860,7 +10625,7 @@
           <a:bodyPr wrap="square" lIns="0" tIns="0" rIns="0" bIns="0" rtlCol="0" anchor="ctr"/>
           <a:lstStyle/>
           <a:p>
-            <a:pPr indent="0" marL="0">
+            <a:pPr marL="0" indent="0">
               <a:buNone/>
             </a:pPr>
             <a:r>
@@ -10889,7 +10654,7 @@
             <a:off x="4069080" y="3355848"/>
             <a:ext cx="146304" cy="146304"/>
           </a:xfrm>
-          <a:prstGeom prst="oval">
+          <a:prstGeom prst="line">
             <a:avLst/>
           </a:prstGeom>
           <a:solidFill>
@@ -10924,7 +10689,7 @@
           <a:bodyPr wrap="square" lIns="0" tIns="0" rIns="0" bIns="0" rtlCol="0" anchor="ctr"/>
           <a:lstStyle/>
           <a:p>
-            <a:pPr indent="0" marL="0">
+            <a:pPr marL="0" indent="0">
               <a:buNone/>
             </a:pPr>
             <a:r>
@@ -10988,7 +10753,7 @@
           <a:bodyPr wrap="square" lIns="0" tIns="0" rIns="0" bIns="0" rtlCol="0" anchor="ctr"/>
           <a:lstStyle/>
           <a:p>
-            <a:pPr indent="0" marL="0">
+            <a:pPr marL="0" indent="0">
               <a:buNone/>
             </a:pPr>
             <a:r>
@@ -11307,4 +11072,319 @@
     </a:ext>
   </a:extLst>
 </a:theme>
+</file>
+
+<file path=ppt/theme/theme2.xml><?xml version="1.0" encoding="utf-8"?>
+<a:theme xmlns:a="http://schemas.openxmlformats.org/drawingml/2006/main" name="Office Theme">
+  <a:themeElements>
+    <a:clrScheme name="Office">
+      <a:dk1>
+        <a:sysClr val="windowText" lastClr="000000"/>
+      </a:dk1>
+      <a:lt1>
+        <a:sysClr val="window" lastClr="FFFFFF"/>
+      </a:lt1>
+      <a:dk2>
+        <a:srgbClr val="0E2841"/>
+      </a:dk2>
+      <a:lt2>
+        <a:srgbClr val="E8E8E8"/>
+      </a:lt2>
+      <a:accent1>
+        <a:srgbClr val="156082"/>
+      </a:accent1>
+      <a:accent2>
+        <a:srgbClr val="E97132"/>
+      </a:accent2>
+      <a:accent3>
+        <a:srgbClr val="196B24"/>
+      </a:accent3>
+      <a:accent4>
+        <a:srgbClr val="0F9ED5"/>
+      </a:accent4>
+      <a:accent5>
+        <a:srgbClr val="A02B93"/>
+      </a:accent5>
+      <a:accent6>
+        <a:srgbClr val="4EA72E"/>
+      </a:accent6>
+      <a:hlink>
+        <a:srgbClr val="467886"/>
+      </a:hlink>
+      <a:folHlink>
+        <a:srgbClr val="96607D"/>
+      </a:folHlink>
+    </a:clrScheme>
+    <a:fontScheme name="Office">
+      <a:majorFont>
+        <a:latin typeface="Aptos Display" panose="02110004020202020204"/>
+        <a:ea typeface=""/>
+        <a:cs typeface=""/>
+        <a:font script="Jpan" typeface="游ゴシック Light"/>
+        <a:font script="Hang" typeface="맑은 고딕"/>
+        <a:font script="Hans" typeface="等线 Light"/>
+        <a:font script="Hant" typeface="新細明體"/>
+        <a:font script="Arab" typeface="Times New Roman"/>
+        <a:font script="Hebr" typeface="Times New Roman"/>
+        <a:font script="Thai" typeface="Angsana New"/>
+        <a:font script="Ethi" typeface="Nyala"/>
+        <a:font script="Beng" typeface="Vrinda"/>
+        <a:font script="Gujr" typeface="Shruti"/>
+        <a:font script="Khmr" typeface="MoolBoran"/>
+        <a:font script="Knda" typeface="Tunga"/>
+        <a:font script="Guru" typeface="Raavi"/>
+        <a:font script="Cans" typeface="Euphemia"/>
+        <a:font script="Cher" typeface="Plantagenet Cherokee"/>
+        <a:font script="Yiii" typeface="Microsoft Yi Baiti"/>
+        <a:font script="Tibt" typeface="Microsoft Himalaya"/>
+        <a:font script="Thaa" typeface="MV Boli"/>
+        <a:font script="Deva" typeface="Mangal"/>
+        <a:font script="Telu" typeface="Gautami"/>
+        <a:font script="Taml" typeface="Latha"/>
+        <a:font script="Syrc" typeface="Estrangelo Edessa"/>
+        <a:font script="Orya" typeface="Kalinga"/>
+        <a:font script="Mlym" typeface="Kartika"/>
+        <a:font script="Laoo" typeface="DokChampa"/>
+        <a:font script="Sinh" typeface="Iskoola Pota"/>
+        <a:font script="Mong" typeface="Mongolian Baiti"/>
+        <a:font script="Viet" typeface="Times New Roman"/>
+        <a:font script="Uigh" typeface="Microsoft Uighur"/>
+        <a:font script="Geor" typeface="Sylfaen"/>
+        <a:font script="Armn" typeface="Arial"/>
+        <a:font script="Bugi" typeface="Leelawadee UI"/>
+        <a:font script="Bopo" typeface="Microsoft JhengHei"/>
+        <a:font script="Java" typeface="Javanese Text"/>
+        <a:font script="Lisu" typeface="Segoe UI"/>
+        <a:font script="Mymr" typeface="Myanmar Text"/>
+        <a:font script="Nkoo" typeface="Ebrima"/>
+        <a:font script="Olck" typeface="Nirmala UI"/>
+        <a:font script="Osma" typeface="Ebrima"/>
+        <a:font script="Phag" typeface="Phagspa"/>
+        <a:font script="Syrn" typeface="Estrangelo Edessa"/>
+        <a:font script="Syrj" typeface="Estrangelo Edessa"/>
+        <a:font script="Syre" typeface="Estrangelo Edessa"/>
+        <a:font script="Sora" typeface="Nirmala UI"/>
+        <a:font script="Tale" typeface="Microsoft Tai Le"/>
+        <a:font script="Talu" typeface="Microsoft New Tai Lue"/>
+        <a:font script="Tfng" typeface="Ebrima"/>
+      </a:majorFont>
+      <a:minorFont>
+        <a:latin typeface="Aptos" panose="02110004020202020204"/>
+        <a:ea typeface=""/>
+        <a:cs typeface=""/>
+        <a:font script="Jpan" typeface="游ゴシック"/>
+        <a:font script="Hang" typeface="맑은 고딕"/>
+        <a:font script="Hans" typeface="等线"/>
+        <a:font script="Hant" typeface="新細明體"/>
+        <a:font script="Arab" typeface="Arial"/>
+        <a:font script="Hebr" typeface="Arial"/>
+        <a:font script="Thai" typeface="Cordia New"/>
+        <a:font script="Ethi" typeface="Nyala"/>
+        <a:font script="Beng" typeface="Vrinda"/>
+        <a:font script="Gujr" typeface="Shruti"/>
+        <a:font script="Khmr" typeface="DaunPenh"/>
+        <a:font script="Knda" typeface="Tunga"/>
+        <a:font script="Guru" typeface="Raavi"/>
+        <a:font script="Cans" typeface="Euphemia"/>
+        <a:font script="Cher" typeface="Plantagenet Cherokee"/>
+        <a:font script="Yiii" typeface="Microsoft Yi Baiti"/>
+        <a:font script="Tibt" typeface="Microsoft Himalaya"/>
+        <a:font script="Thaa" typeface="MV Boli"/>
+        <a:font script="Deva" typeface="Mangal"/>
+        <a:font script="Telu" typeface="Gautami"/>
+        <a:font script="Taml" typeface="Latha"/>
+        <a:font script="Syrc" typeface="Estrangelo Edessa"/>
+        <a:font script="Orya" typeface="Kalinga"/>
+        <a:font script="Mlym" typeface="Kartika"/>
+        <a:font script="Laoo" typeface="DokChampa"/>
+        <a:font script="Sinh" typeface="Iskoola Pota"/>
+        <a:font script="Mong" typeface="Mongolian Baiti"/>
+        <a:font script="Viet" typeface="Arial"/>
+        <a:font script="Uigh" typeface="Microsoft Uighur"/>
+        <a:font script="Geor" typeface="Sylfaen"/>
+        <a:font script="Armn" typeface="Arial"/>
+        <a:font script="Bugi" typeface="Leelawadee UI"/>
+        <a:font script="Bopo" typeface="Microsoft JhengHei"/>
+        <a:font script="Java" typeface="Javanese Text"/>
+        <a:font script="Lisu" typeface="Segoe UI"/>
+        <a:font script="Mymr" typeface="Myanmar Text"/>
+        <a:font script="Nkoo" typeface="Ebrima"/>
+        <a:font script="Olck" typeface="Nirmala UI"/>
+        <a:font script="Osma" typeface="Ebrima"/>
+        <a:font script="Phag" typeface="Phagspa"/>
+        <a:font script="Syrn" typeface="Estrangelo Edessa"/>
+        <a:font script="Syrj" typeface="Estrangelo Edessa"/>
+        <a:font script="Syre" typeface="Estrangelo Edessa"/>
+        <a:font script="Sora" typeface="Nirmala UI"/>
+        <a:font script="Tale" typeface="Microsoft Tai Le"/>
+        <a:font script="Talu" typeface="Microsoft New Tai Lue"/>
+        <a:font script="Tfng" typeface="Ebrima"/>
+      </a:minorFont>
+    </a:fontScheme>
+    <a:fmtScheme name="Office">
+      <a:fillStyleLst>
+        <a:solidFill>
+          <a:schemeClr val="phClr"/>
+        </a:solidFill>
+        <a:gradFill rotWithShape="1">
+          <a:gsLst>
+            <a:gs pos="0">
+              <a:schemeClr val="phClr">
+                <a:lumMod val="110000"/>
+                <a:satMod val="105000"/>
+                <a:tint val="67000"/>
+              </a:schemeClr>
+            </a:gs>
+            <a:gs pos="50000">
+              <a:schemeClr val="phClr">
+                <a:lumMod val="105000"/>
+                <a:satMod val="103000"/>
+                <a:tint val="73000"/>
+              </a:schemeClr>
+            </a:gs>
+            <a:gs pos="100000">
+              <a:schemeClr val="phClr">
+                <a:lumMod val="105000"/>
+                <a:satMod val="109000"/>
+                <a:tint val="81000"/>
+              </a:schemeClr>
+            </a:gs>
+          </a:gsLst>
+          <a:lin ang="5400000" scaled="0"/>
+        </a:gradFill>
+        <a:gradFill rotWithShape="1">
+          <a:gsLst>
+            <a:gs pos="0">
+              <a:schemeClr val="phClr">
+                <a:satMod val="103000"/>
+                <a:lumMod val="102000"/>
+                <a:tint val="94000"/>
+              </a:schemeClr>
+            </a:gs>
+            <a:gs pos="50000">
+              <a:schemeClr val="phClr">
+                <a:satMod val="110000"/>
+                <a:lumMod val="100000"/>
+                <a:shade val="100000"/>
+              </a:schemeClr>
+            </a:gs>
+            <a:gs pos="100000">
+              <a:schemeClr val="phClr">
+                <a:lumMod val="99000"/>
+                <a:satMod val="120000"/>
+                <a:shade val="78000"/>
+              </a:schemeClr>
+            </a:gs>
+          </a:gsLst>
+          <a:lin ang="5400000" scaled="0"/>
+        </a:gradFill>
+      </a:fillStyleLst>
+      <a:lnStyleLst>
+        <a:ln w="12700" cap="flat" cmpd="sng" algn="ctr">
+          <a:solidFill>
+            <a:schemeClr val="phClr"/>
+          </a:solidFill>
+          <a:prstDash val="solid"/>
+          <a:miter lim="800000"/>
+        </a:ln>
+        <a:ln w="19050" cap="flat" cmpd="sng" algn="ctr">
+          <a:solidFill>
+            <a:schemeClr val="phClr"/>
+          </a:solidFill>
+          <a:prstDash val="solid"/>
+          <a:miter lim="800000"/>
+        </a:ln>
+        <a:ln w="25400" cap="flat" cmpd="sng" algn="ctr">
+          <a:solidFill>
+            <a:schemeClr val="phClr"/>
+          </a:solidFill>
+          <a:prstDash val="solid"/>
+          <a:miter lim="800000"/>
+        </a:ln>
+      </a:lnStyleLst>
+      <a:effectStyleLst>
+        <a:effectStyle>
+          <a:effectLst/>
+        </a:effectStyle>
+        <a:effectStyle>
+          <a:effectLst/>
+        </a:effectStyle>
+        <a:effectStyle>
+          <a:effectLst>
+            <a:outerShdw blurRad="57150" dist="19050" dir="5400000" algn="ctr" rotWithShape="0">
+              <a:srgbClr val="000000">
+                <a:alpha val="63000"/>
+              </a:srgbClr>
+            </a:outerShdw>
+          </a:effectLst>
+        </a:effectStyle>
+      </a:effectStyleLst>
+      <a:bgFillStyleLst>
+        <a:solidFill>
+          <a:schemeClr val="phClr"/>
+        </a:solidFill>
+        <a:solidFill>
+          <a:schemeClr val="phClr">
+            <a:tint val="95000"/>
+            <a:satMod val="170000"/>
+          </a:schemeClr>
+        </a:solidFill>
+        <a:gradFill rotWithShape="1">
+          <a:gsLst>
+            <a:gs pos="0">
+              <a:schemeClr val="phClr">
+                <a:tint val="93000"/>
+                <a:satMod val="150000"/>
+                <a:shade val="98000"/>
+                <a:lumMod val="102000"/>
+              </a:schemeClr>
+            </a:gs>
+            <a:gs pos="50000">
+              <a:schemeClr val="phClr">
+                <a:tint val="98000"/>
+                <a:satMod val="130000"/>
+                <a:shade val="90000"/>
+                <a:lumMod val="103000"/>
+              </a:schemeClr>
+            </a:gs>
+            <a:gs pos="100000">
+              <a:schemeClr val="phClr">
+                <a:shade val="63000"/>
+                <a:satMod val="120000"/>
+              </a:schemeClr>
+            </a:gs>
+          </a:gsLst>
+          <a:lin ang="5400000" scaled="0"/>
+        </a:gradFill>
+      </a:bgFillStyleLst>
+    </a:fmtScheme>
+  </a:themeElements>
+  <a:objectDefaults>
+    <a:lnDef>
+      <a:spPr/>
+      <a:bodyPr/>
+      <a:lstStyle/>
+      <a:style>
+        <a:lnRef idx="2">
+          <a:schemeClr val="accent1"/>
+        </a:lnRef>
+        <a:fillRef idx="0">
+          <a:schemeClr val="accent1"/>
+        </a:fillRef>
+        <a:effectRef idx="1">
+          <a:schemeClr val="accent1"/>
+        </a:effectRef>
+        <a:fontRef idx="minor">
+          <a:schemeClr val="tx1"/>
+        </a:fontRef>
+      </a:style>
+    </a:lnDef>
+  </a:objectDefaults>
+  <a:extraClrSchemeLst/>
+  <a:extLst>
+    <a:ext uri="{05A4C25C-085E-4340-85A3-A5531E510DB2}">
+      <thm15:themeFamily xmlns:thm15="http://schemas.microsoft.com/office/thememl/2012/main" name="Office Theme" id="{2E142A2C-CD16-42D6-873A-C26D2A0506FA}" vid="{1BDDFF52-6CD6-40A5-AB3C-68EB2F1E4D0A}"/>
+    </a:ext>
+  </a:extLst>
+</a:theme>
 </file>
--- a/Clase_7/PPTs/Clase07_Scoring_Threshold.pptx
+++ b/Clase_7/PPTs/Clase07_Scoring_Threshold.pptx
@@ -2245,7 +2245,7 @@
         </p:nvSpPr>
         <p:spPr>
           <a:xfrm>
-            <a:off x="3931920" y="3877056"/>
+            <a:off x="3858277" y="3890772"/>
             <a:ext cx="4892040" cy="804672"/>
           </a:xfrm>
           <a:prstGeom prst="rect">
@@ -2684,7 +2684,7 @@
         </p:nvSpPr>
         <p:spPr>
           <a:xfrm>
-            <a:off x="0" y="0"/>
+            <a:off x="0" y="169164"/>
             <a:ext cx="9144000" cy="960120"/>
           </a:xfrm>
           <a:prstGeom prst="rect">
@@ -3471,7 +3471,7 @@
         </p:nvSpPr>
         <p:spPr>
           <a:xfrm>
-            <a:off x="4663440" y="1078992"/>
+            <a:off x="4617720" y="1070155"/>
             <a:ext cx="4160520" cy="3822192"/>
           </a:xfrm>
           <a:prstGeom prst="rect">
@@ -5864,7 +5864,7 @@
         </p:nvSpPr>
         <p:spPr>
           <a:xfrm>
-            <a:off x="320040" y="4507992"/>
+            <a:off x="320040" y="4459142"/>
             <a:ext cx="8503920" cy="347472"/>
           </a:xfrm>
           <a:prstGeom prst="rect">
@@ -5889,7 +5889,7 @@
         </p:nvSpPr>
         <p:spPr>
           <a:xfrm>
-            <a:off x="475488" y="4562856"/>
+            <a:off x="475488" y="4514006"/>
             <a:ext cx="8229600" cy="237744"/>
           </a:xfrm>
           <a:prstGeom prst="rect">
@@ -8566,7 +8566,7 @@
         </p:nvSpPr>
         <p:spPr>
           <a:xfrm>
-            <a:off x="320040" y="4279392"/>
+            <a:off x="320040" y="4270248"/>
             <a:ext cx="8503920" cy="621792"/>
           </a:xfrm>
           <a:prstGeom prst="rect">
